--- a/downloads/DCT_V2_Ch03_Slides.pptx
+++ b/downloads/DCT_V2_Ch03_Slides.pptx
@@ -130,7 +130,7 @@
   <p:extLst>
     <p:ext uri="{521415D9-36F7-43E2-AB2F-B90AF26B5E84}">
       <p14:sectionLst xmlns:p14="http://schemas.microsoft.com/office/powerpoint/2010/main">
-        <p14:section name="Opening" id="{c9aaf117-cbe7-57a7-afbf-68b274949bc7}">
+        <p14:section name="Opening" id="{8d9920bc-25cd-705c-7671-1447ca539658}">
           <p14:sldIdLst>
             <p14:sldId id="256"/>
             <p14:sldId id="257"/>
@@ -138,42 +138,42 @@
             <p14:sldId id="259"/>
           </p14:sldIdLst>
         </p14:section>
-        <p14:section name="3.1 What Convexity Buys" id="{c1920f12-9821-8966-fa17-3e3b62ba9e17}">
+        <p14:section name="3.1 What Convexity Buys" id="{f2d2787b-111b-af5c-7778-a28aabff265f}">
           <p14:sldIdLst>
             <p14:sldId id="260"/>
             <p14:sldId id="261"/>
           </p14:sldIdLst>
         </p14:section>
-        <p14:section name="3.2 Recognizing Convexity" id="{22042cfd-1b80-6ce3-4d31-8b9047b8315c}">
+        <p14:section name="3.2 Recognizing Convexity" id="{92d89e9f-ac72-ff9f-1c5a-d1ed1ffc08a9}">
           <p14:sldIdLst>
             <p14:sldId id="262"/>
             <p14:sldId id="263"/>
           </p14:sldIdLst>
         </p14:section>
-        <p14:section name="3.3 Convex Instances and Global Answers" id="{8a71a86f-a1ff-a971-6326-d4bac4a2f2cc}">
+        <p14:section name="3.3 Convex Instances and Global Answers" id="{9e9881b9-8a2e-f281-ca7c-f8354628c3a6}">
           <p14:sldIdLst>
             <p14:sldId id="264"/>
           </p14:sldIdLst>
         </p14:section>
-        <p14:section name="3.4 Duality: Prices You Can Check" id="{dd340cfd-10b3-10a0-f5d5-633bc5fd1542}">
+        <p14:section name="3.4 Duality: Prices You Can Check" id="{6339d137-bb0f-5e8d-ff14-41000d007ba8}">
           <p14:sldIdLst>
             <p14:sldId id="265"/>
             <p14:sldId id="266"/>
             <p14:sldId id="267"/>
           </p14:sldIdLst>
         </p14:section>
-        <p14:section name="3.5 Rewriting Commitments in Convex Form" id="{ee195fc7-3c47-ad6a-ec78-5cb33e32f1fc}">
+        <p14:section name="3.5 Rewriting Commitments in Convex Form" id="{a472eda1-d25c-bc85-75ab-0364537b74c4}">
           <p14:sldIdLst>
             <p14:sldId id="268"/>
           </p14:sldIdLst>
         </p14:section>
-        <p14:section name="3.6 Solving, Certifying, and Bounding" id="{410cd73d-419a-e8c9-6437-a263a8693491}">
+        <p14:section name="3.6 Solving, Certifying, and Bounding" id="{42f1e555-85ea-4405-fe98-476ec583924c}">
           <p14:sldIdLst>
             <p14:sldId id="269"/>
             <p14:sldId id="270"/>
           </p14:sldIdLst>
         </p14:section>
-        <p14:section name="Worked Example 3.1" id="{72137fe8-df68-8624-a8c6-6880330fa120}">
+        <p14:section name="Worked Example 3.1" id="{893bc2e9-8214-9bb9-4773-689863089501}">
           <p14:sldIdLst>
             <p14:sldId id="271"/>
             <p14:sldId id="272"/>
@@ -182,12 +182,12 @@
             <p14:sldId id="275"/>
           </p14:sldIdLst>
         </p14:section>
-        <p14:section name="AXIOM Lab 2.3" id="{99c3c36a-6510-4fcf-4bcf-a98f900a968c}">
+        <p14:section name="AXIOM Lab 2.3" id="{092ecdeb-136a-3c19-2303-52cec86b5532}">
           <p14:sldIdLst>
             <p14:sldId id="276"/>
           </p14:sldIdLst>
         </p14:section>
-        <p14:section name="Close" id="{46529a05-fd38-bdfd-1934-187df0139519}">
+        <p14:section name="Close" id="{92b4fb5f-29cb-cf48-5bd9-8c5a5fdb07e6}">
           <p14:sldIdLst>
             <p14:sldId id="277"/>
             <p14:sldId id="278"/>

--- a/downloads/DCT_V2_Ch03_Slides.pptx
+++ b/downloads/DCT_V2_Ch03_Slides.pptx
@@ -130,7 +130,7 @@
   <p:extLst>
     <p:ext uri="{521415D9-36F7-43E2-AB2F-B90AF26B5E84}">
       <p14:sectionLst xmlns:p14="http://schemas.microsoft.com/office/powerpoint/2010/main">
-        <p14:section name="Opening" id="{8d9920bc-25cd-705c-7671-1447ca539658}">
+        <p14:section name="Opening" id="{9c275847-ae2e-fd23-2980-b55ca62055c1}">
           <p14:sldIdLst>
             <p14:sldId id="256"/>
             <p14:sldId id="257"/>
@@ -138,42 +138,42 @@
             <p14:sldId id="259"/>
           </p14:sldIdLst>
         </p14:section>
-        <p14:section name="3.1 What Convexity Buys" id="{f2d2787b-111b-af5c-7778-a28aabff265f}">
+        <p14:section name="3.1 What Convexity Buys" id="{c7f79ec0-faa2-45a5-da14-302cbf71a0a8}">
           <p14:sldIdLst>
             <p14:sldId id="260"/>
             <p14:sldId id="261"/>
           </p14:sldIdLst>
         </p14:section>
-        <p14:section name="3.2 Recognizing Convexity" id="{92d89e9f-ac72-ff9f-1c5a-d1ed1ffc08a9}">
+        <p14:section name="3.2 Recognizing Convexity" id="{783af994-4d81-14fc-982b-d21537ed96ed}">
           <p14:sldIdLst>
             <p14:sldId id="262"/>
             <p14:sldId id="263"/>
           </p14:sldIdLst>
         </p14:section>
-        <p14:section name="3.3 Convex Instances and Global Answers" id="{9e9881b9-8a2e-f281-ca7c-f8354628c3a6}">
+        <p14:section name="3.3 Convex Instances and Global Answers" id="{1e67ffdd-f48d-1dad-a09d-4fa0748802ce}">
           <p14:sldIdLst>
             <p14:sldId id="264"/>
           </p14:sldIdLst>
         </p14:section>
-        <p14:section name="3.4 Duality: Prices You Can Check" id="{6339d137-bb0f-5e8d-ff14-41000d007ba8}">
+        <p14:section name="3.4 Duality: Prices You Can Check" id="{e33dc20e-2d46-8ea1-ef20-4c6fcc982f9e}">
           <p14:sldIdLst>
             <p14:sldId id="265"/>
             <p14:sldId id="266"/>
             <p14:sldId id="267"/>
           </p14:sldIdLst>
         </p14:section>
-        <p14:section name="3.5 Rewriting Commitments in Convex Form" id="{a472eda1-d25c-bc85-75ab-0364537b74c4}">
+        <p14:section name="3.5 Rewriting Commitments in Convex Form" id="{df174315-2bca-6e02-0c65-4483923b208d}">
           <p14:sldIdLst>
             <p14:sldId id="268"/>
           </p14:sldIdLst>
         </p14:section>
-        <p14:section name="3.6 Solving, Certifying, and Bounding" id="{42f1e555-85ea-4405-fe98-476ec583924c}">
+        <p14:section name="3.6 Solving, Certifying, and Bounding" id="{82690815-8028-dbe9-9a66-b90186b22fc2}">
           <p14:sldIdLst>
             <p14:sldId id="269"/>
             <p14:sldId id="270"/>
           </p14:sldIdLst>
         </p14:section>
-        <p14:section name="Worked Example 3.1" id="{893bc2e9-8214-9bb9-4773-689863089501}">
+        <p14:section name="Worked Example 3.1" id="{85a9c6ea-d2d8-5f12-3830-0392ee178945}">
           <p14:sldIdLst>
             <p14:sldId id="271"/>
             <p14:sldId id="272"/>
@@ -182,12 +182,12 @@
             <p14:sldId id="275"/>
           </p14:sldIdLst>
         </p14:section>
-        <p14:section name="AXIOM Lab 2.3" id="{092ecdeb-136a-3c19-2303-52cec86b5532}">
+        <p14:section name="AXIOM Lab 2.3" id="{70382c0f-88c7-c78a-ba12-cc8f75922e25}">
           <p14:sldIdLst>
             <p14:sldId id="276"/>
           </p14:sldIdLst>
         </p14:section>
-        <p14:section name="Close" id="{92b4fb5f-29cb-cf48-5bd9-8c5a5fdb07e6}">
+        <p14:section name="Close" id="{3783ce7b-67e8-fdfd-f25a-434136208b36}">
           <p14:sldIdLst>
             <p14:sldId id="277"/>
             <p14:sldId id="278"/>

--- a/downloads/DCT_V2_Ch03_Slides.pptx
+++ b/downloads/DCT_V2_Ch03_Slides.pptx
@@ -29,9 +29,10 @@
     <p:sldId id="277" r:id="rId23"/>
     <p:sldId id="278" r:id="rId24"/>
     <p:sldId id="279" r:id="rId25"/>
+    <p:sldId id="280" r:id="rId26"/>
   </p:sldIdLst>
   <p:notesMasterIdLst>
-    <p:notesMasterId r:id="rId26"/>
+    <p:notesMasterId r:id="rId27"/>
   </p:notesMasterIdLst>
   <p:sldSz cx="12192000" cy="6858000"/>
   <p:notesSz cx="6858000" cy="12192000"/>
@@ -130,7 +131,7 @@
   <p:extLst>
     <p:ext uri="{521415D9-36F7-43E2-AB2F-B90AF26B5E84}">
       <p14:sectionLst xmlns:p14="http://schemas.microsoft.com/office/powerpoint/2010/main">
-        <p14:section name="Opening" id="{9c275847-ae2e-fd23-2980-b55ca62055c1}">
+        <p14:section name="Opening" id="{70f47ec4-ff53-80f8-8891-22ae6d5acaf6}">
           <p14:sldIdLst>
             <p14:sldId id="256"/>
             <p14:sldId id="257"/>
@@ -138,42 +139,42 @@
             <p14:sldId id="259"/>
           </p14:sldIdLst>
         </p14:section>
-        <p14:section name="3.1 What Convexity Buys" id="{c7f79ec0-faa2-45a5-da14-302cbf71a0a8}">
+        <p14:section name="3.1 What Convexity Buys" id="{a3ed0095-8108-f0d8-2c05-dda2461080b2}">
           <p14:sldIdLst>
             <p14:sldId id="260"/>
             <p14:sldId id="261"/>
           </p14:sldIdLst>
         </p14:section>
-        <p14:section name="3.2 Recognizing Convexity" id="{783af994-4d81-14fc-982b-d21537ed96ed}">
+        <p14:section name="3.2 Recognizing Convexity" id="{397d0724-4c66-c339-8696-75a85e328463}">
           <p14:sldIdLst>
             <p14:sldId id="262"/>
             <p14:sldId id="263"/>
           </p14:sldIdLst>
         </p14:section>
-        <p14:section name="3.3 Convex Instances and Global Answers" id="{1e67ffdd-f48d-1dad-a09d-4fa0748802ce}">
+        <p14:section name="3.3 Convex Instances and Global Answers" id="{facdfe50-95b3-da9c-c07d-c047c655fa75}">
           <p14:sldIdLst>
             <p14:sldId id="264"/>
           </p14:sldIdLst>
         </p14:section>
-        <p14:section name="3.4 Duality: Prices You Can Check" id="{e33dc20e-2d46-8ea1-ef20-4c6fcc982f9e}">
+        <p14:section name="3.4 Duality: Prices You Can Check" id="{19cc36a3-3a5b-8175-fe2c-765a53cbc6fd}">
           <p14:sldIdLst>
             <p14:sldId id="265"/>
             <p14:sldId id="266"/>
             <p14:sldId id="267"/>
           </p14:sldIdLst>
         </p14:section>
-        <p14:section name="3.5 Rewriting Commitments in Convex Form" id="{df174315-2bca-6e02-0c65-4483923b208d}">
+        <p14:section name="3.5 Rewriting Commitments in Convex Form" id="{95eef900-8033-b1dc-c115-70b4c19ec9b6}">
           <p14:sldIdLst>
             <p14:sldId id="268"/>
           </p14:sldIdLst>
         </p14:section>
-        <p14:section name="3.6 Solving, Certifying, and Bounding" id="{82690815-8028-dbe9-9a66-b90186b22fc2}">
+        <p14:section name="3.6 Solving, Certifying, and Bounding" id="{e04442e3-a260-10f8-147d-b9768295841f}">
           <p14:sldIdLst>
             <p14:sldId id="269"/>
             <p14:sldId id="270"/>
           </p14:sldIdLst>
         </p14:section>
-        <p14:section name="Worked Example 3.1" id="{85a9c6ea-d2d8-5f12-3830-0392ee178945}">
+        <p14:section name="Worked Example 3.1" id="{93c82feb-e454-14e0-9b02-0c357cca156e}">
           <p14:sldIdLst>
             <p14:sldId id="271"/>
             <p14:sldId id="272"/>
@@ -182,16 +183,21 @@
             <p14:sldId id="275"/>
           </p14:sldIdLst>
         </p14:section>
-        <p14:section name="AXIOM Lab 2.3" id="{70382c0f-88c7-c78a-ba12-cc8f75922e25}">
+        <p14:section name="In Practice" id="{bc8dd5d6-d863-3bbc-96f8-36f0a30fbdbc}">
           <p14:sldIdLst>
             <p14:sldId id="276"/>
           </p14:sldIdLst>
         </p14:section>
-        <p14:section name="Close" id="{3783ce7b-67e8-fdfd-f25a-434136208b36}">
+        <p14:section name="AXIOM Lab 2.3" id="{99c0130e-4333-4313-cdf1-291179bb6133}">
           <p14:sldIdLst>
             <p14:sldId id="277"/>
+          </p14:sldIdLst>
+        </p14:section>
+        <p14:section name="Close" id="{2057b0a6-9108-00f2-a93a-9abf62f9baf6}">
+          <p14:sldIdLst>
             <p14:sldId id="278"/>
             <p14:sldId id="279"/>
+            <p14:sldId id="280"/>
           </p14:sldIdLst>
         </p14:section>
       </p14:sectionLst>
@@ -1742,7 +1748,7 @@
           <a:p>
             <a:r>
               <a:rPr lang="en-US" dirty="0"/>
-              <a:t>AXIOM Lab 2.3. What to look for: a model that fails the convexity check in one form and passes in another (Table 3.2); a gap that closes to zero (Theorem 3.4); margins equal to the cost exactly where a round is partial (Theorem 3.5); and a ceiling that bounds every lumpy plan while rounding sometimes fails (Proposition 3.2).</a:t>
+              <a:t>In Practice, Chapter 3: MISO Prices Power with Its Multipliers. A real organization's decision of this chapter's kind, told from its published record; every figure is cited in the book. The lesson for Meridian: Prices anyone can check certify the dispatch; the lumpy commitment is certified by a gap of at most 0.1 percent. Sources: Carlson et al. (2012), Interfaces; INFORMS; MISO (2011); CAISO tariff; Liu, Tesfatsion and Chowdhury (2009); FERC staff (2011).</a:t>
             </a:r>
             <a:endParaRPr lang="en-US" dirty="0"/>
           </a:p>
@@ -1830,7 +1836,7 @@
           <a:p>
             <a:r>
               <a:rPr lang="en-US" dirty="0"/>
-              <a:t>Key Takeaways, Chapter 3.</a:t>
+              <a:t>AXIOM Lab 2.3. What to look for: a model that fails the convexity check in one form and passes in another (Table 3.2); a gap that closes to zero (Theorem 3.4); margins equal to the cost exactly where a round is partial (Theorem 3.5); and a ceiling that bounds every lumpy plan while rounding sometimes fails (Proposition 3.2).</a:t>
             </a:r>
             <a:endParaRPr lang="en-US" dirty="0"/>
           </a:p>
@@ -1918,7 +1924,7 @@
           <a:p>
             <a:r>
               <a:rPr lang="en-US" dirty="0"/>
-              <a:t>The notebook and workbook are on the course website, www.dynamiccorporatetransformation.com.</a:t>
+              <a:t>Key Takeaways, Chapter 3.</a:t>
             </a:r>
             <a:endParaRPr lang="en-US" dirty="0"/>
           </a:p>
@@ -2006,7 +2012,7 @@
           <a:p>
             <a:r>
               <a:rPr lang="en-US" dirty="0"/>
-              <a:t>Chapter 4, Nonlinear and Mixed-Integer Enterprise Optimization (chapter abstract and Equation 4.1): three plans pass every local test, Chapter 3's relaxation puts the best within $1.01 million of anything achievable, and five convex solves prove it best.</a:t>
+              <a:t>The notebook and workbook are on the course website, www.dynamiccorporatetransformation.com.</a:t>
             </a:r>
             <a:endParaRPr lang="en-US" dirty="0"/>
           </a:p>
@@ -2030,6 +2036,94 @@
             <a:fld id="{F7021451-1387-4CA6-816F-3879F97B5CBC}" type="slidenum">
               <a:rPr lang="en-US"/>
               <a:t>24</a:t>
+            </a:fld>
+            <a:endParaRPr lang="en-US"/>
+          </a:p>
+        </p:txBody>
+      </p:sp>
+    </p:spTree>
+    <p:extLst>
+      <p:ext uri="{BB962C8B-B14F-4D97-AF65-F5344CB8AC3E}">
+        <p14:creationId xmlns:p14="http://schemas.microsoft.com/office/powerpoint/2010/main" val="1024086991"/>
+      </p:ext>
+    </p:extLst>
+  </p:cSld>
+  <p:clrMapOvr>
+    <a:masterClrMapping/>
+  </p:clrMapOvr>
+</p:notes>
+</file>
+
+<file path=ppt/notesSlides/notesSlide25.xml><?xml version="1.0" encoding="utf-8"?>
+<p:notes xmlns:a="http://schemas.openxmlformats.org/drawingml/2006/main" xmlns:r="http://schemas.openxmlformats.org/officeDocument/2006/relationships" xmlns:p="http://schemas.openxmlformats.org/presentationml/2006/main">
+  <p:cSld>
+    <p:spTree>
+      <p:nvGrpSpPr>
+        <p:cNvPr id="1" name=""/>
+        <p:cNvGrpSpPr/>
+        <p:nvPr/>
+      </p:nvGrpSpPr>
+      <p:grpSpPr>
+        <a:xfrm>
+          <a:off x="0" y="0"/>
+          <a:ext cx="0" cy="0"/>
+          <a:chOff x="0" y="0"/>
+          <a:chExt cx="0" cy="0"/>
+        </a:xfrm>
+      </p:grpSpPr>
+      <p:sp>
+        <p:nvSpPr>
+          <p:cNvPr id="2" name="Slide Image Placeholder 1"/>
+          <p:cNvSpPr>
+            <a:spLocks noGrp="1" noRot="1" noChangeAspect="1"/>
+          </p:cNvSpPr>
+          <p:nvPr>
+            <p:ph type="sldImg"/>
+          </p:nvPr>
+        </p:nvSpPr>
+        <p:spPr/>
+      </p:sp>
+      <p:sp>
+        <p:nvSpPr>
+          <p:cNvPr id="3" name="Notes Placeholder 2"/>
+          <p:cNvSpPr>
+            <a:spLocks noGrp="1"/>
+          </p:cNvSpPr>
+          <p:nvPr>
+            <p:ph type="body" idx="1"/>
+          </p:nvPr>
+        </p:nvSpPr>
+        <p:spPr/>
+        <p:txBody>
+          <a:bodyPr/>
+          <a:lstStyle/>
+          <a:p>
+            <a:r>
+              <a:rPr lang="en-US" dirty="0"/>
+              <a:t>Chapter 4, Nonlinear and Mixed-Integer Enterprise Optimization (chapter abstract and Equation 4.1): three plans pass every local test, Chapter 3's relaxation puts the best within $1.01 million of anything achievable, and five convex solves prove it best.</a:t>
+            </a:r>
+            <a:endParaRPr lang="en-US" dirty="0"/>
+          </a:p>
+        </p:txBody>
+      </p:sp>
+      <p:sp>
+        <p:nvSpPr>
+          <p:cNvPr id="4" name="Slide Number Placeholder 3"/>
+          <p:cNvSpPr>
+            <a:spLocks noGrp="1"/>
+          </p:cNvSpPr>
+          <p:nvPr>
+            <p:ph type="sldNum" sz="quarter" idx="10"/>
+          </p:nvPr>
+        </p:nvSpPr>
+        <p:spPr/>
+        <p:txBody>
+          <a:bodyPr/>
+          <a:lstStyle/>
+          <a:p>
+            <a:fld id="{F7021451-1387-4CA6-816F-3879F97B5CBC}" type="slidenum">
+              <a:rPr lang="en-US"/>
+              <a:t>25</a:t>
             </a:fld>
             <a:endParaRPr lang="en-US"/>
           </a:p>
@@ -15366,7 +15460,7 @@
                   <a:schemeClr val="accent1"/>
                 </a:solidFill>
               </a:rPr>
-              <a:t>AXIOM LAB 2.3 · MODULE AXIOM-03</a:t>
+              <a:t>IN PRACTICE · MISO</a:t>
             </a:r>
             <a:endParaRPr lang="en-US" sz="1200" dirty="0"/>
           </a:p>
@@ -15407,804 +15501,26 @@
                 <a:ea typeface="Cambria" pitchFamily="34" charset="-122"/>
                 <a:cs typeface="Cambria" pitchFamily="34" charset="-120"/>
               </a:rPr>
-              <a:t>Ceilings and price lists, in AXIOM</a:t>
+              <a:t>MISO's prices are its multipliers</a:t>
             </a:r>
             <a:endParaRPr lang="en-US" sz="3200" dirty="0"/>
           </a:p>
         </p:txBody>
       </p:sp>
-      <p:pic>
-        <p:nvPicPr>
-          <p:cNvPr id="5" name="AXIOM logo" descr="AXIOM">    </p:cNvPr>
-          <p:cNvPicPr>
-            <a:picLocks noChangeAspect="1"/>
-          </p:cNvPicPr>
-          <p:nvPr/>
-        </p:nvPicPr>
-        <p:blipFill>
-          <a:blip r:embed="rId1"/>
-          <a:stretch>
-            <a:fillRect/>
-          </a:stretch>
-        </p:blipFill>
-        <p:spPr>
-          <a:xfrm>
-            <a:off x="9539935" y="310896"/>
-            <a:ext cx="2103120" cy="420624"/>
-          </a:xfrm>
-          <a:prstGeom prst="rect">
-            <a:avLst/>
-          </a:prstGeom>
-        </p:spPr>
-      </p:pic>
-      <p:sp>
-        <p:nvSpPr>
-          <p:cNvPr id="6" name="Situation"/>
-          <p:cNvSpPr txBox="1"/>
-          <p:nvPr/>
-        </p:nvSpPr>
-        <p:spPr>
-          <a:xfrm>
-            <a:off x="548640" y="1645920"/>
-            <a:ext cx="11094415" cy="777240"/>
-          </a:xfrm>
-          <a:prstGeom prst="rect">
-            <a:avLst/>
-          </a:prstGeom>
-          <a:noFill/>
-          <a:ln/>
-        </p:spPr>
-        <p:txBody>
-          <a:bodyPr wrap="square" lIns="0" tIns="0" rIns="0" bIns="0" rtlCol="0" anchor="t"/>
-          <a:lstStyle/>
-          <a:p>
-            <a:pPr indent="0" marL="0">
-              <a:buNone/>
-            </a:pPr>
-            <a:r>
-              <a:rPr lang="en-US" sz="1500" dirty="0">
-                <a:solidFill>
-                  <a:schemeClr val="tx1"/>
-                </a:solidFill>
-              </a:rPr>
-              <a:t>Meridian's chief risk officer wants a ceiling on the value of any automation plan, computed without enumeration, and a price list the board can audit. Open AXIOM, choose Lab 2.3 and load the Meridian automation relaxation.</a:t>
-            </a:r>
-            <a:endParaRPr lang="en-US" sz="1500" dirty="0"/>
-          </a:p>
-        </p:txBody>
-      </p:sp>
-      <p:sp>
-        <p:nvSpPr>
-          <p:cNvPr id="7" name="Flow line"/>
+      <p:sp>
+        <p:nvSpPr>
+          <p:cNvPr id="5" name="Card"/>
           <p:cNvSpPr/>
           <p:nvPr/>
         </p:nvSpPr>
         <p:spPr>
           <a:xfrm>
-            <a:off x="1658082" y="2880360"/>
-            <a:ext cx="8875532" cy="0"/>
-          </a:xfrm>
-          <a:prstGeom prst="line">
-            <a:avLst/>
-          </a:prstGeom>
-          <a:noFill/>
-          <a:ln w="25400">
-            <a:solidFill>
-              <a:srgbClr val="C4CBD8"/>
-            </a:solidFill>
-            <a:prstDash val="solid"/>
-          </a:ln>
-        </p:spPr>
-      </p:sp>
-      <p:sp>
-        <p:nvSpPr>
-          <p:cNvPr id="8" name="Number"/>
-          <p:cNvSpPr/>
-          <p:nvPr/>
-        </p:nvSpPr>
-        <p:spPr>
-          <a:xfrm>
-            <a:off x="1383762" y="2606040"/>
-            <a:ext cx="548640" cy="548640"/>
-          </a:xfrm>
-          <a:prstGeom prst="ellipse">
-            <a:avLst/>
-          </a:prstGeom>
-          <a:solidFill>
-            <a:schemeClr val="accent1"/>
-          </a:solidFill>
-          <a:ln w="6350">
-            <a:solidFill>
-              <a:schemeClr val="accent1"/>
-            </a:solidFill>
-            <a:prstDash val="solid"/>
-          </a:ln>
-        </p:spPr>
-      </p:sp>
-      <p:sp>
-        <p:nvSpPr>
-          <p:cNvPr id="9" name="Text 5"/>
-          <p:cNvSpPr txBox="1"/>
-          <p:nvPr/>
-        </p:nvSpPr>
-        <p:spPr>
-          <a:xfrm>
-            <a:off x="1383762" y="2606040"/>
-            <a:ext cx="548640" cy="548640"/>
-          </a:xfrm>
-          <a:prstGeom prst="rect">
-            <a:avLst/>
-          </a:prstGeom>
-          <a:noFill/>
-          <a:ln/>
-        </p:spPr>
-        <p:txBody>
-          <a:bodyPr wrap="square" lIns="0" tIns="0" rIns="0" bIns="0" rtlCol="0" anchor="ctr"/>
-          <a:lstStyle/>
-          <a:p>
-            <a:pPr algn="ctr" indent="0" marL="0">
-              <a:buNone/>
-            </a:pPr>
-            <a:r>
-              <a:rPr lang="en-US" sz="1600" b="1" dirty="0">
-                <a:solidFill>
-                  <a:schemeClr val="bg1"/>
-                </a:solidFill>
-                <a:latin typeface="Calibri" pitchFamily="34" charset="0"/>
-                <a:ea typeface="Calibri" pitchFamily="34" charset="-122"/>
-                <a:cs typeface="Calibri" pitchFamily="34" charset="-120"/>
-              </a:rPr>
-              <a:t>1</a:t>
-            </a:r>
-            <a:endParaRPr lang="en-US" sz="1600" dirty="0"/>
-          </a:p>
-        </p:txBody>
-      </p:sp>
-      <p:sp>
-        <p:nvSpPr>
-          <p:cNvPr id="10" name="Flow head"/>
-          <p:cNvSpPr txBox="1"/>
-          <p:nvPr/>
-        </p:nvSpPr>
-        <p:spPr>
-          <a:xfrm>
-            <a:off x="621792" y="3291840"/>
-            <a:ext cx="2072579" cy="548640"/>
-          </a:xfrm>
-          <a:prstGeom prst="rect">
-            <a:avLst/>
-          </a:prstGeom>
-          <a:noFill/>
-          <a:ln/>
-        </p:spPr>
-        <p:txBody>
-          <a:bodyPr wrap="square" lIns="0" tIns="0" rIns="0" bIns="0" rtlCol="0" anchor="t"/>
-          <a:lstStyle/>
-          <a:p>
-            <a:pPr algn="ctr" indent="0" marL="0">
-              <a:buNone/>
-            </a:pPr>
-            <a:r>
-              <a:rPr lang="en-US" sz="1600" b="1" dirty="0">
-                <a:solidFill>
-                  <a:schemeClr val="tx1"/>
-                </a:solidFill>
-                <a:latin typeface="Cambria" pitchFamily="34" charset="0"/>
-                <a:ea typeface="Cambria" pitchFamily="34" charset="-122"/>
-                <a:cs typeface="Cambria" pitchFamily="34" charset="-120"/>
-              </a:rPr>
-              <a:t>Recognize</a:t>
-            </a:r>
-            <a:endParaRPr lang="en-US" sz="1600" dirty="0"/>
-          </a:p>
-        </p:txBody>
-      </p:sp>
-      <p:sp>
-        <p:nvSpPr>
-          <p:cNvPr id="11" name="Flow text"/>
-          <p:cNvSpPr txBox="1"/>
-          <p:nvPr/>
-        </p:nvSpPr>
-        <p:spPr>
-          <a:xfrm>
-            <a:off x="640080" y="3867912"/>
-            <a:ext cx="2036003" cy="1554480"/>
-          </a:xfrm>
-          <a:prstGeom prst="rect">
-            <a:avLst/>
-          </a:prstGeom>
-          <a:noFill/>
-          <a:ln/>
-        </p:spPr>
-        <p:txBody>
-          <a:bodyPr wrap="square" lIns="0" tIns="0" rIns="0" bIns="0" rtlCol="0" anchor="t"/>
-          <a:lstStyle/>
-          <a:p>
-            <a:pPr algn="ctr" indent="0" marL="0">
-              <a:buNone/>
-            </a:pPr>
-            <a:r>
-              <a:rPr lang="en-US" sz="1400" dirty="0">
-                <a:solidFill>
-                  <a:schemeClr val="tx2"/>
-                </a:solidFill>
-              </a:rPr>
-              <a:t>Enter the program in both forms; check they agree at the 64 lumpy plans; find the violating chord.</a:t>
-            </a:r>
-            <a:endParaRPr lang="en-US" sz="1400" dirty="0"/>
-          </a:p>
-        </p:txBody>
-      </p:sp>
-      <p:sp>
-        <p:nvSpPr>
-          <p:cNvPr id="12" name="Number"/>
-          <p:cNvSpPr/>
-          <p:nvPr/>
-        </p:nvSpPr>
-        <p:spPr>
-          <a:xfrm>
-            <a:off x="3602645" y="2606040"/>
-            <a:ext cx="548640" cy="548640"/>
-          </a:xfrm>
-          <a:prstGeom prst="ellipse">
-            <a:avLst/>
-          </a:prstGeom>
-          <a:solidFill>
-            <a:schemeClr val="accent1"/>
-          </a:solidFill>
-          <a:ln w="6350">
-            <a:solidFill>
-              <a:schemeClr val="accent1"/>
-            </a:solidFill>
-            <a:prstDash val="solid"/>
-          </a:ln>
-        </p:spPr>
-      </p:sp>
-      <p:sp>
-        <p:nvSpPr>
-          <p:cNvPr id="13" name="Text 9"/>
-          <p:cNvSpPr txBox="1"/>
-          <p:nvPr/>
-        </p:nvSpPr>
-        <p:spPr>
-          <a:xfrm>
-            <a:off x="3602645" y="2606040"/>
-            <a:ext cx="548640" cy="548640"/>
-          </a:xfrm>
-          <a:prstGeom prst="rect">
-            <a:avLst/>
-          </a:prstGeom>
-          <a:noFill/>
-          <a:ln/>
-        </p:spPr>
-        <p:txBody>
-          <a:bodyPr wrap="square" lIns="0" tIns="0" rIns="0" bIns="0" rtlCol="0" anchor="ctr"/>
-          <a:lstStyle/>
-          <a:p>
-            <a:pPr algn="ctr" indent="0" marL="0">
-              <a:buNone/>
-            </a:pPr>
-            <a:r>
-              <a:rPr lang="en-US" sz="1600" b="1" dirty="0">
-                <a:solidFill>
-                  <a:schemeClr val="bg1"/>
-                </a:solidFill>
-                <a:latin typeface="Calibri" pitchFamily="34" charset="0"/>
-                <a:ea typeface="Calibri" pitchFamily="34" charset="-122"/>
-                <a:cs typeface="Calibri" pitchFamily="34" charset="-120"/>
-              </a:rPr>
-              <a:t>2</a:t>
-            </a:r>
-            <a:endParaRPr lang="en-US" sz="1600" dirty="0"/>
-          </a:p>
-        </p:txBody>
-      </p:sp>
-      <p:sp>
-        <p:nvSpPr>
-          <p:cNvPr id="14" name="Flow head"/>
-          <p:cNvSpPr txBox="1"/>
-          <p:nvPr/>
-        </p:nvSpPr>
-        <p:spPr>
-          <a:xfrm>
-            <a:off x="2840675" y="3291840"/>
-            <a:ext cx="2072579" cy="548640"/>
-          </a:xfrm>
-          <a:prstGeom prst="rect">
-            <a:avLst/>
-          </a:prstGeom>
-          <a:noFill/>
-          <a:ln/>
-        </p:spPr>
-        <p:txBody>
-          <a:bodyPr wrap="square" lIns="0" tIns="0" rIns="0" bIns="0" rtlCol="0" anchor="t"/>
-          <a:lstStyle/>
-          <a:p>
-            <a:pPr algn="ctr" indent="0" marL="0">
-              <a:buNone/>
-            </a:pPr>
-            <a:r>
-              <a:rPr lang="en-US" sz="1600" b="1" dirty="0">
-                <a:solidFill>
-                  <a:schemeClr val="tx1"/>
-                </a:solidFill>
-                <a:latin typeface="Cambria" pitchFamily="34" charset="0"/>
-                <a:ea typeface="Cambria" pitchFamily="34" charset="-122"/>
-                <a:cs typeface="Cambria" pitchFamily="34" charset="-120"/>
-              </a:rPr>
-              <a:t>Solve</a:t>
-            </a:r>
-            <a:endParaRPr lang="en-US" sz="1600" dirty="0"/>
-          </a:p>
-        </p:txBody>
-      </p:sp>
-      <p:sp>
-        <p:nvSpPr>
-          <p:cNvPr id="15" name="Flow text"/>
-          <p:cNvSpPr txBox="1"/>
-          <p:nvPr/>
-        </p:nvSpPr>
-        <p:spPr>
-          <a:xfrm>
-            <a:off x="2858963" y="3867912"/>
-            <a:ext cx="2036003" cy="1554480"/>
-          </a:xfrm>
-          <a:prstGeom prst="rect">
-            <a:avLst/>
-          </a:prstGeom>
-          <a:noFill/>
-          <a:ln/>
-        </p:spPr>
-        <p:txBody>
-          <a:bodyPr wrap="square" lIns="0" tIns="0" rIns="0" bIns="0" rtlCol="0" anchor="t"/>
-          <a:lstStyle/>
-          <a:p>
-            <a:pPr algn="ctr" indent="0" marL="0">
-              <a:buNone/>
-            </a:pPr>
-            <a:r>
-              <a:rPr lang="en-US" sz="1400" dirty="0">
-                <a:solidFill>
-                  <a:schemeClr val="tx2"/>
-                </a:solidFill>
-              </a:rPr>
-              <a:t>Declare the relaxation in disciplined convex form, solve it, and watch the duality gap close.</a:t>
-            </a:r>
-            <a:endParaRPr lang="en-US" sz="1400" dirty="0"/>
-          </a:p>
-        </p:txBody>
-      </p:sp>
-      <p:sp>
-        <p:nvSpPr>
-          <p:cNvPr id="16" name="Number"/>
-          <p:cNvSpPr/>
-          <p:nvPr/>
-        </p:nvSpPr>
-        <p:spPr>
-          <a:xfrm>
-            <a:off x="5821528" y="2606040"/>
-            <a:ext cx="548640" cy="548640"/>
-          </a:xfrm>
-          <a:prstGeom prst="ellipse">
-            <a:avLst/>
-          </a:prstGeom>
-          <a:solidFill>
-            <a:schemeClr val="accent1"/>
-          </a:solidFill>
-          <a:ln w="6350">
-            <a:solidFill>
-              <a:schemeClr val="accent1"/>
-            </a:solidFill>
-            <a:prstDash val="solid"/>
-          </a:ln>
-        </p:spPr>
-      </p:sp>
-      <p:sp>
-        <p:nvSpPr>
-          <p:cNvPr id="17" name="Text 13"/>
-          <p:cNvSpPr txBox="1"/>
-          <p:nvPr/>
-        </p:nvSpPr>
-        <p:spPr>
-          <a:xfrm>
-            <a:off x="5821528" y="2606040"/>
-            <a:ext cx="548640" cy="548640"/>
-          </a:xfrm>
-          <a:prstGeom prst="rect">
-            <a:avLst/>
-          </a:prstGeom>
-          <a:noFill/>
-          <a:ln/>
-        </p:spPr>
-        <p:txBody>
-          <a:bodyPr wrap="square" lIns="0" tIns="0" rIns="0" bIns="0" rtlCol="0" anchor="ctr"/>
-          <a:lstStyle/>
-          <a:p>
-            <a:pPr algn="ctr" indent="0" marL="0">
-              <a:buNone/>
-            </a:pPr>
-            <a:r>
-              <a:rPr lang="en-US" sz="1600" b="1" dirty="0">
-                <a:solidFill>
-                  <a:schemeClr val="bg1"/>
-                </a:solidFill>
-                <a:latin typeface="Calibri" pitchFamily="34" charset="0"/>
-                <a:ea typeface="Calibri" pitchFamily="34" charset="-122"/>
-                <a:cs typeface="Calibri" pitchFamily="34" charset="-120"/>
-              </a:rPr>
-              <a:t>3</a:t>
-            </a:r>
-            <a:endParaRPr lang="en-US" sz="1600" dirty="0"/>
-          </a:p>
-        </p:txBody>
-      </p:sp>
-      <p:sp>
-        <p:nvSpPr>
-          <p:cNvPr id="18" name="Flow head"/>
-          <p:cNvSpPr txBox="1"/>
-          <p:nvPr/>
-        </p:nvSpPr>
-        <p:spPr>
-          <a:xfrm>
-            <a:off x="5059558" y="3291840"/>
-            <a:ext cx="2072579" cy="548640"/>
-          </a:xfrm>
-          <a:prstGeom prst="rect">
-            <a:avLst/>
-          </a:prstGeom>
-          <a:noFill/>
-          <a:ln/>
-        </p:spPr>
-        <p:txBody>
-          <a:bodyPr wrap="square" lIns="0" tIns="0" rIns="0" bIns="0" rtlCol="0" anchor="t"/>
-          <a:lstStyle/>
-          <a:p>
-            <a:pPr algn="ctr" indent="0" marL="0">
-              <a:buNone/>
-            </a:pPr>
-            <a:r>
-              <a:rPr lang="en-US" sz="1600" b="1" dirty="0">
-                <a:solidFill>
-                  <a:schemeClr val="tx1"/>
-                </a:solidFill>
-                <a:latin typeface="Cambria" pitchFamily="34" charset="0"/>
-                <a:ea typeface="Cambria" pitchFamily="34" charset="-122"/>
-                <a:cs typeface="Cambria" pitchFamily="34" charset="-120"/>
-              </a:rPr>
-              <a:t>Audit</a:t>
-            </a:r>
-            <a:endParaRPr lang="en-US" sz="1600" dirty="0"/>
-          </a:p>
-        </p:txBody>
-      </p:sp>
-      <p:sp>
-        <p:nvSpPr>
-          <p:cNvPr id="19" name="Flow text"/>
-          <p:cNvSpPr txBox="1"/>
-          <p:nvPr/>
-        </p:nvSpPr>
-        <p:spPr>
-          <a:xfrm>
-            <a:off x="5077846" y="3867912"/>
-            <a:ext cx="2036003" cy="1554480"/>
-          </a:xfrm>
-          <a:prstGeom prst="rect">
-            <a:avLst/>
-          </a:prstGeom>
-          <a:noFill/>
-          <a:ln/>
-        </p:spPr>
-        <p:txBody>
-          <a:bodyPr wrap="square" lIns="0" tIns="0" rIns="0" bIns="0" rtlCol="0" anchor="t"/>
-          <a:lstStyle/>
-          <a:p>
-            <a:pPr algn="ctr" indent="0" marL="0">
-              <a:buNone/>
-            </a:pPr>
-            <a:r>
-              <a:rPr lang="en-US" sz="1400" dirty="0">
-                <a:solidFill>
-                  <a:schemeClr val="tx2"/>
-                </a:solidFill>
-              </a:rPr>
-              <a:t>Run the KKT verification module; rebuild the marginal values and prices of Figure 3.3(a).</a:t>
-            </a:r>
-            <a:endParaRPr lang="en-US" sz="1400" dirty="0"/>
-          </a:p>
-        </p:txBody>
-      </p:sp>
-      <p:sp>
-        <p:nvSpPr>
-          <p:cNvPr id="20" name="Number"/>
-          <p:cNvSpPr/>
-          <p:nvPr/>
-        </p:nvSpPr>
-        <p:spPr>
-          <a:xfrm>
-            <a:off x="8040411" y="2606040"/>
-            <a:ext cx="548640" cy="548640"/>
-          </a:xfrm>
-          <a:prstGeom prst="ellipse">
-            <a:avLst/>
-          </a:prstGeom>
-          <a:solidFill>
-            <a:schemeClr val="accent1"/>
-          </a:solidFill>
-          <a:ln w="6350">
-            <a:solidFill>
-              <a:schemeClr val="accent1"/>
-            </a:solidFill>
-            <a:prstDash val="solid"/>
-          </a:ln>
-        </p:spPr>
-      </p:sp>
-      <p:sp>
-        <p:nvSpPr>
-          <p:cNvPr id="21" name="Text 17"/>
-          <p:cNvSpPr txBox="1"/>
-          <p:nvPr/>
-        </p:nvSpPr>
-        <p:spPr>
-          <a:xfrm>
-            <a:off x="8040411" y="2606040"/>
-            <a:ext cx="548640" cy="548640"/>
-          </a:xfrm>
-          <a:prstGeom prst="rect">
-            <a:avLst/>
-          </a:prstGeom>
-          <a:noFill/>
-          <a:ln/>
-        </p:spPr>
-        <p:txBody>
-          <a:bodyPr wrap="square" lIns="0" tIns="0" rIns="0" bIns="0" rtlCol="0" anchor="ctr"/>
-          <a:lstStyle/>
-          <a:p>
-            <a:pPr algn="ctr" indent="0" marL="0">
-              <a:buNone/>
-            </a:pPr>
-            <a:r>
-              <a:rPr lang="en-US" sz="1600" b="1" dirty="0">
-                <a:solidFill>
-                  <a:schemeClr val="bg1"/>
-                </a:solidFill>
-                <a:latin typeface="Calibri" pitchFamily="34" charset="0"/>
-                <a:ea typeface="Calibri" pitchFamily="34" charset="-122"/>
-                <a:cs typeface="Calibri" pitchFamily="34" charset="-120"/>
-              </a:rPr>
-              <a:t>4</a:t>
-            </a:r>
-            <a:endParaRPr lang="en-US" sz="1600" dirty="0"/>
-          </a:p>
-        </p:txBody>
-      </p:sp>
-      <p:sp>
-        <p:nvSpPr>
-          <p:cNvPr id="22" name="Flow head"/>
-          <p:cNvSpPr txBox="1"/>
-          <p:nvPr/>
-        </p:nvSpPr>
-        <p:spPr>
-          <a:xfrm>
-            <a:off x="7278441" y="3291840"/>
-            <a:ext cx="2072579" cy="548640"/>
-          </a:xfrm>
-          <a:prstGeom prst="rect">
-            <a:avLst/>
-          </a:prstGeom>
-          <a:noFill/>
-          <a:ln/>
-        </p:spPr>
-        <p:txBody>
-          <a:bodyPr wrap="square" lIns="0" tIns="0" rIns="0" bIns="0" rtlCol="0" anchor="t"/>
-          <a:lstStyle/>
-          <a:p>
-            <a:pPr algn="ctr" indent="0" marL="0">
-              <a:buNone/>
-            </a:pPr>
-            <a:r>
-              <a:rPr lang="en-US" sz="1600" b="1" dirty="0">
-                <a:solidFill>
-                  <a:schemeClr val="tx1"/>
-                </a:solidFill>
-                <a:latin typeface="Cambria" pitchFamily="34" charset="0"/>
-                <a:ea typeface="Cambria" pitchFamily="34" charset="-122"/>
-                <a:cs typeface="Cambria" pitchFamily="34" charset="-120"/>
-              </a:rPr>
-              <a:t>Bound</a:t>
-            </a:r>
-            <a:endParaRPr lang="en-US" sz="1600" dirty="0"/>
-          </a:p>
-        </p:txBody>
-      </p:sp>
-      <p:sp>
-        <p:nvSpPr>
-          <p:cNvPr id="23" name="Flow text"/>
-          <p:cNvSpPr txBox="1"/>
-          <p:nvPr/>
-        </p:nvSpPr>
-        <p:spPr>
-          <a:xfrm>
-            <a:off x="7296729" y="3867912"/>
-            <a:ext cx="2036003" cy="1554480"/>
-          </a:xfrm>
-          <a:prstGeom prst="rect">
-            <a:avLst/>
-          </a:prstGeom>
-          <a:noFill/>
-          <a:ln/>
-        </p:spPr>
-        <p:txBody>
-          <a:bodyPr wrap="square" lIns="0" tIns="0" rIns="0" bIns="0" rtlCol="0" anchor="t"/>
-          <a:lstStyle/>
-          <a:p>
-            <a:pPr algn="ctr" indent="0" marL="0">
-              <a:buNone/>
-            </a:pPr>
-            <a:r>
-              <a:rPr lang="en-US" sz="1400" dirty="0">
-                <a:solidFill>
-                  <a:schemeClr val="tx2"/>
-                </a:solidFill>
-              </a:rPr>
-              <a:t>Compare the ceiling with the 64 lumpy plans; value the plan rounded down and rounded up.</a:t>
-            </a:r>
-            <a:endParaRPr lang="en-US" sz="1400" dirty="0"/>
-          </a:p>
-        </p:txBody>
-      </p:sp>
-      <p:sp>
-        <p:nvSpPr>
-          <p:cNvPr id="24" name="Number"/>
-          <p:cNvSpPr/>
-          <p:nvPr/>
-        </p:nvSpPr>
-        <p:spPr>
-          <a:xfrm>
-            <a:off x="10259294" y="2606040"/>
-            <a:ext cx="548640" cy="548640"/>
-          </a:xfrm>
-          <a:prstGeom prst="ellipse">
-            <a:avLst/>
-          </a:prstGeom>
-          <a:solidFill>
-            <a:schemeClr val="accent1"/>
-          </a:solidFill>
-          <a:ln w="6350">
-            <a:solidFill>
-              <a:schemeClr val="accent1"/>
-            </a:solidFill>
-            <a:prstDash val="solid"/>
-          </a:ln>
-        </p:spPr>
-      </p:sp>
-      <p:sp>
-        <p:nvSpPr>
-          <p:cNvPr id="25" name="Text 21"/>
-          <p:cNvSpPr txBox="1"/>
-          <p:nvPr/>
-        </p:nvSpPr>
-        <p:spPr>
-          <a:xfrm>
-            <a:off x="10259294" y="2606040"/>
-            <a:ext cx="548640" cy="548640"/>
-          </a:xfrm>
-          <a:prstGeom prst="rect">
-            <a:avLst/>
-          </a:prstGeom>
-          <a:noFill/>
-          <a:ln/>
-        </p:spPr>
-        <p:txBody>
-          <a:bodyPr wrap="square" lIns="0" tIns="0" rIns="0" bIns="0" rtlCol="0" anchor="ctr"/>
-          <a:lstStyle/>
-          <a:p>
-            <a:pPr algn="ctr" indent="0" marL="0">
-              <a:buNone/>
-            </a:pPr>
-            <a:r>
-              <a:rPr lang="en-US" sz="1600" b="1" dirty="0">
-                <a:solidFill>
-                  <a:schemeClr val="bg1"/>
-                </a:solidFill>
-                <a:latin typeface="Calibri" pitchFamily="34" charset="0"/>
-                <a:ea typeface="Calibri" pitchFamily="34" charset="-122"/>
-                <a:cs typeface="Calibri" pitchFamily="34" charset="-120"/>
-              </a:rPr>
-              <a:t>5</a:t>
-            </a:r>
-            <a:endParaRPr lang="en-US" sz="1600" dirty="0"/>
-          </a:p>
-        </p:txBody>
-      </p:sp>
-      <p:sp>
-        <p:nvSpPr>
-          <p:cNvPr id="26" name="Flow head"/>
-          <p:cNvSpPr txBox="1"/>
-          <p:nvPr/>
-        </p:nvSpPr>
-        <p:spPr>
-          <a:xfrm>
-            <a:off x="9497324" y="3291840"/>
-            <a:ext cx="2072579" cy="548640"/>
-          </a:xfrm>
-          <a:prstGeom prst="rect">
-            <a:avLst/>
-          </a:prstGeom>
-          <a:noFill/>
-          <a:ln/>
-        </p:spPr>
-        <p:txBody>
-          <a:bodyPr wrap="square" lIns="0" tIns="0" rIns="0" bIns="0" rtlCol="0" anchor="t"/>
-          <a:lstStyle/>
-          <a:p>
-            <a:pPr algn="ctr" indent="0" marL="0">
-              <a:buNone/>
-            </a:pPr>
-            <a:r>
-              <a:rPr lang="en-US" sz="1600" b="1" dirty="0">
-                <a:solidFill>
-                  <a:schemeClr val="tx1"/>
-                </a:solidFill>
-                <a:latin typeface="Cambria" pitchFamily="34" charset="0"/>
-                <a:ea typeface="Cambria" pitchFamily="34" charset="-122"/>
-                <a:cs typeface="Cambria" pitchFamily="34" charset="-120"/>
-              </a:rPr>
-              <a:t>Stress the prices</a:t>
-            </a:r>
-            <a:endParaRPr lang="en-US" sz="1600" dirty="0"/>
-          </a:p>
-        </p:txBody>
-      </p:sp>
-      <p:sp>
-        <p:nvSpPr>
-          <p:cNvPr id="27" name="Flow text"/>
-          <p:cNvSpPr txBox="1"/>
-          <p:nvPr/>
-        </p:nvSpPr>
-        <p:spPr>
-          <a:xfrm>
-            <a:off x="9515612" y="3867912"/>
-            <a:ext cx="2036003" cy="1554480"/>
-          </a:xfrm>
-          <a:prstGeom prst="rect">
-            <a:avLst/>
-          </a:prstGeom>
-          <a:noFill/>
-          <a:ln/>
-        </p:spPr>
-        <p:txBody>
-          <a:bodyPr wrap="square" lIns="0" tIns="0" rIns="0" bIns="0" rtlCol="0" anchor="t"/>
-          <a:lstStyle/>
-          <a:p>
-            <a:pPr algn="ctr" indent="0" marL="0">
-              <a:buNone/>
-            </a:pPr>
-            <a:r>
-              <a:rPr lang="en-US" sz="1400" dirty="0">
-                <a:solidFill>
-                  <a:schemeClr val="tx2"/>
-                </a:solidFill>
-              </a:rPr>
-              <a:t>Move the credit from 0 to 60 years, add a capital cap, and find the kink at $360m.</a:t>
-            </a:r>
-            <a:endParaRPr lang="en-US" sz="1400" dirty="0"/>
-          </a:p>
-        </p:txBody>
-      </p:sp>
-      <p:sp>
-        <p:nvSpPr>
-          <p:cNvPr id="28" name="Deliverable card"/>
-          <p:cNvSpPr/>
-          <p:nvPr/>
-        </p:nvSpPr>
-        <p:spPr>
-          <a:xfrm>
-            <a:off x="548640" y="5486400"/>
-            <a:ext cx="11094415" cy="685800"/>
+            <a:off x="548640" y="1691640"/>
+            <a:ext cx="3515258" cy="2103120"/>
           </a:xfrm>
           <a:prstGeom prst="roundRect">
             <a:avLst>
-              <a:gd name="adj" fmla="val 10667"/>
+              <a:gd name="adj" fmla="val 3478"/>
             </a:avLst>
           </a:prstGeom>
           <a:solidFill>
@@ -16220,14 +15536,14 @@
       </p:sp>
       <p:sp>
         <p:nvSpPr>
-          <p:cNvPr id="29" name="Deliverable"/>
+          <p:cNvPr id="6" name="Card label"/>
           <p:cNvSpPr txBox="1"/>
           <p:nvPr/>
         </p:nvSpPr>
         <p:spPr>
           <a:xfrm>
-            <a:off x="777240" y="5559552"/>
-            <a:ext cx="10637215" cy="539496"/>
+            <a:off x="731520" y="1819656"/>
+            <a:ext cx="3149498" cy="310896"/>
           </a:xfrm>
           <a:prstGeom prst="rect">
             <a:avLst/>
@@ -16243,22 +15559,779 @@
               <a:buNone/>
             </a:pPr>
             <a:r>
-              <a:rPr lang="en-US" sz="1400" b="1" dirty="0">
+              <a:rPr lang="en-US" sz="1300" b="1" dirty="0">
+                <a:solidFill>
+                  <a:schemeClr val="accent1"/>
+                </a:solidFill>
+              </a:rPr>
+              <a:t>The decision</a:t>
+            </a:r>
+            <a:endParaRPr lang="en-US" sz="1300" dirty="0"/>
+          </a:p>
+        </p:txBody>
+      </p:sp>
+      <p:sp>
+        <p:nvSpPr>
+          <p:cNvPr id="7" name="Card head"/>
+          <p:cNvSpPr txBox="1"/>
+          <p:nvPr/>
+        </p:nvSpPr>
+        <p:spPr>
+          <a:xfrm>
+            <a:off x="731520" y="2148840"/>
+            <a:ext cx="3149498" cy="576072"/>
+          </a:xfrm>
+          <a:prstGeom prst="rect">
+            <a:avLst/>
+          </a:prstGeom>
+          <a:noFill/>
+          <a:ln/>
+        </p:spPr>
+        <p:txBody>
+          <a:bodyPr wrap="square" lIns="0" tIns="0" rIns="0" bIns="0" rtlCol="0" anchor="t"/>
+          <a:lstStyle/>
+          <a:p>
+            <a:pPr indent="0" marL="0">
+              <a:buNone/>
+            </a:pPr>
+            <a:r>
+              <a:rPr lang="en-US" sz="1600" b="1" dirty="0">
                 <a:solidFill>
                   <a:schemeClr val="tx1"/>
                 </a:solidFill>
-              </a:rPr>
-              <a:t>Deliverable:</a:t>
-            </a:r>
-            <a:r>
-              <a:rPr lang="en-US" sz="1400" dirty="0">
+                <a:latin typeface="Cambria" pitchFamily="34" charset="0"/>
+                <a:ea typeface="Cambria" pitchFamily="34" charset="-122"/>
+                <a:cs typeface="Cambria" pitchFamily="34" charset="-120"/>
+              </a:rPr>
+              <a:t>Who runs, how much, at what price</a:t>
+            </a:r>
+            <a:endParaRPr lang="en-US" sz="1600" dirty="0"/>
+          </a:p>
+        </p:txBody>
+      </p:sp>
+      <p:sp>
+        <p:nvSpPr>
+          <p:cNvPr id="8" name="Card text"/>
+          <p:cNvSpPr txBox="1"/>
+          <p:nvPr/>
+        </p:nvSpPr>
+        <p:spPr>
+          <a:xfrm>
+            <a:off x="731520" y="2798064"/>
+            <a:ext cx="3149498" cy="868680"/>
+          </a:xfrm>
+          <a:prstGeom prst="rect">
+            <a:avLst/>
+          </a:prstGeom>
+          <a:noFill/>
+          <a:ln/>
+        </p:spPr>
+        <p:txBody>
+          <a:bodyPr wrap="square" lIns="0" tIns="0" rIns="0" bIns="0" rtlCol="0" anchor="t"/>
+          <a:lstStyle/>
+          <a:p>
+            <a:pPr indent="0" marL="0">
+              <a:buNone/>
+            </a:pPr>
+            <a:r>
+              <a:rPr lang="en-US" sz="1300" dirty="0">
+                <a:solidFill>
+                  <a:schemeClr val="tx2"/>
+                </a:solidFill>
+              </a:rPr>
+              <a:t>Commit plants each day, dispatch them every five minutes, and price energy at each point of the grid.</a:t>
+            </a:r>
+            <a:endParaRPr lang="en-US" sz="1300" dirty="0"/>
+          </a:p>
+        </p:txBody>
+      </p:sp>
+      <p:sp>
+        <p:nvSpPr>
+          <p:cNvPr id="9" name="Card"/>
+          <p:cNvSpPr/>
+          <p:nvPr/>
+        </p:nvSpPr>
+        <p:spPr>
+          <a:xfrm>
+            <a:off x="4338218" y="1691640"/>
+            <a:ext cx="3515258" cy="2103120"/>
+          </a:xfrm>
+          <a:prstGeom prst="roundRect">
+            <a:avLst>
+              <a:gd name="adj" fmla="val 3478"/>
+            </a:avLst>
+          </a:prstGeom>
+          <a:solidFill>
+            <a:schemeClr val="bg2"/>
+          </a:solidFill>
+          <a:ln w="9525">
+            <a:solidFill>
+              <a:srgbClr val="C4CBD8"/>
+            </a:solidFill>
+            <a:prstDash val="solid"/>
+          </a:ln>
+        </p:spPr>
+      </p:sp>
+      <p:sp>
+        <p:nvSpPr>
+          <p:cNvPr id="10" name="Card label"/>
+          <p:cNvSpPr txBox="1"/>
+          <p:nvPr/>
+        </p:nvSpPr>
+        <p:spPr>
+          <a:xfrm>
+            <a:off x="4521098" y="1819656"/>
+            <a:ext cx="3149498" cy="310896"/>
+          </a:xfrm>
+          <a:prstGeom prst="rect">
+            <a:avLst/>
+          </a:prstGeom>
+          <a:noFill/>
+          <a:ln/>
+        </p:spPr>
+        <p:txBody>
+          <a:bodyPr wrap="square" lIns="0" tIns="0" rIns="0" bIns="0" rtlCol="0" anchor="ctr"/>
+          <a:lstStyle/>
+          <a:p>
+            <a:pPr indent="0" marL="0">
+              <a:buNone/>
+            </a:pPr>
+            <a:r>
+              <a:rPr lang="en-US" sz="1300" b="1" dirty="0">
+                <a:solidFill>
+                  <a:schemeClr val="accent1"/>
+                </a:solidFill>
+              </a:rPr>
+              <a:t>The method</a:t>
+            </a:r>
+            <a:endParaRPr lang="en-US" sz="1300" dirty="0"/>
+          </a:p>
+        </p:txBody>
+      </p:sp>
+      <p:sp>
+        <p:nvSpPr>
+          <p:cNvPr id="11" name="Card head"/>
+          <p:cNvSpPr txBox="1"/>
+          <p:nvPr/>
+        </p:nvSpPr>
+        <p:spPr>
+          <a:xfrm>
+            <a:off x="4521098" y="2148840"/>
+            <a:ext cx="3149498" cy="576072"/>
+          </a:xfrm>
+          <a:prstGeom prst="rect">
+            <a:avLst/>
+          </a:prstGeom>
+          <a:noFill/>
+          <a:ln/>
+        </p:spPr>
+        <p:txBody>
+          <a:bodyPr wrap="square" lIns="0" tIns="0" rIns="0" bIns="0" rtlCol="0" anchor="t"/>
+          <a:lstStyle/>
+          <a:p>
+            <a:pPr indent="0" marL="0">
+              <a:buNone/>
+            </a:pPr>
+            <a:r>
+              <a:rPr lang="en-US" sz="1600" b="1" dirty="0">
                 <a:solidFill>
                   <a:schemeClr val="tx1"/>
                 </a:solidFill>
-              </a:rPr>
-              <a:t> a one-page note to the board: the ceiling and the solver's certificate, the three-round plan's distance from it, the price list, the credits at which the relaxation proves the lumpy plan best, and whether further search is worth its cost. About 75 minutes.</a:t>
-            </a:r>
-            <a:endParaRPr lang="en-US" sz="1400" dirty="0"/>
+                <a:latin typeface="Cambria" pitchFamily="34" charset="0"/>
+                <a:ea typeface="Cambria" pitchFamily="34" charset="-122"/>
+                <a:cs typeface="Cambria" pitchFamily="34" charset="-120"/>
+              </a:rPr>
+              <a:t>Commit, then dispatch and price</a:t>
+            </a:r>
+            <a:endParaRPr lang="en-US" sz="1600" dirty="0"/>
+          </a:p>
+        </p:txBody>
+      </p:sp>
+      <p:sp>
+        <p:nvSpPr>
+          <p:cNvPr id="12" name="Card text"/>
+          <p:cNvSpPr txBox="1"/>
+          <p:nvPr/>
+        </p:nvSpPr>
+        <p:spPr>
+          <a:xfrm>
+            <a:off x="4521098" y="2798064"/>
+            <a:ext cx="3149498" cy="868680"/>
+          </a:xfrm>
+          <a:prstGeom prst="rect">
+            <a:avLst/>
+          </a:prstGeom>
+          <a:noFill/>
+          <a:ln/>
+        </p:spPr>
+        <p:txBody>
+          <a:bodyPr wrap="square" lIns="0" tIns="0" rIns="0" bIns="0" rtlCol="0" anchor="t"/>
+          <a:lstStyle/>
+          <a:p>
+            <a:pPr indent="0" marL="0">
+              <a:buNone/>
+            </a:pPr>
+            <a:r>
+              <a:rPr lang="en-US" sz="1300" dirty="0">
+                <a:solidFill>
+                  <a:schemeClr val="tx2"/>
+                </a:solidFill>
+              </a:rPr>
+              <a:t>A mixed-integer program commits the plants; with commitments fixed, the dispatch's shadow prices are the prices.</a:t>
+            </a:r>
+            <a:endParaRPr lang="en-US" sz="1300" dirty="0"/>
+          </a:p>
+        </p:txBody>
+      </p:sp>
+      <p:sp>
+        <p:nvSpPr>
+          <p:cNvPr id="13" name="Card"/>
+          <p:cNvSpPr/>
+          <p:nvPr/>
+        </p:nvSpPr>
+        <p:spPr>
+          <a:xfrm>
+            <a:off x="8127797" y="1691640"/>
+            <a:ext cx="3515258" cy="2103120"/>
+          </a:xfrm>
+          <a:prstGeom prst="roundRect">
+            <a:avLst>
+              <a:gd name="adj" fmla="val 3478"/>
+            </a:avLst>
+          </a:prstGeom>
+          <a:solidFill>
+            <a:schemeClr val="tx1"/>
+          </a:solidFill>
+          <a:ln w="9525">
+            <a:solidFill>
+              <a:srgbClr val="0F1E3D"/>
+            </a:solidFill>
+            <a:prstDash val="solid"/>
+          </a:ln>
+        </p:spPr>
+      </p:sp>
+      <p:sp>
+        <p:nvSpPr>
+          <p:cNvPr id="14" name="Card label"/>
+          <p:cNvSpPr txBox="1"/>
+          <p:nvPr/>
+        </p:nvSpPr>
+        <p:spPr>
+          <a:xfrm>
+            <a:off x="8310677" y="1819656"/>
+            <a:ext cx="3149498" cy="310896"/>
+          </a:xfrm>
+          <a:prstGeom prst="rect">
+            <a:avLst/>
+          </a:prstGeom>
+          <a:noFill/>
+          <a:ln/>
+        </p:spPr>
+        <p:txBody>
+          <a:bodyPr wrap="square" lIns="0" tIns="0" rIns="0" bIns="0" rtlCol="0" anchor="ctr"/>
+          <a:lstStyle/>
+          <a:p>
+            <a:pPr indent="0" marL="0">
+              <a:buNone/>
+            </a:pPr>
+            <a:r>
+              <a:rPr lang="en-US" sz="1300" b="1" dirty="0">
+                <a:solidFill>
+                  <a:schemeClr val="accent1"/>
+                </a:solidFill>
+              </a:rPr>
+              <a:t>The result</a:t>
+            </a:r>
+            <a:endParaRPr lang="en-US" sz="1300" dirty="0"/>
+          </a:p>
+        </p:txBody>
+      </p:sp>
+      <p:sp>
+        <p:nvSpPr>
+          <p:cNvPr id="15" name="Card head"/>
+          <p:cNvSpPr txBox="1"/>
+          <p:nvPr/>
+        </p:nvSpPr>
+        <p:spPr>
+          <a:xfrm>
+            <a:off x="8310677" y="2148840"/>
+            <a:ext cx="3149498" cy="576072"/>
+          </a:xfrm>
+          <a:prstGeom prst="rect">
+            <a:avLst/>
+          </a:prstGeom>
+          <a:noFill/>
+          <a:ln/>
+        </p:spPr>
+        <p:txBody>
+          <a:bodyPr wrap="square" lIns="0" tIns="0" rIns="0" bIns="0" rtlCol="0" anchor="t"/>
+          <a:lstStyle/>
+          <a:p>
+            <a:pPr indent="0" marL="0">
+              <a:buNone/>
+            </a:pPr>
+            <a:r>
+              <a:rPr lang="en-US" sz="1600" b="1" dirty="0">
+                <a:solidFill>
+                  <a:schemeClr val="bg1"/>
+                </a:solidFill>
+                <a:latin typeface="Cambria" pitchFamily="34" charset="0"/>
+                <a:ea typeface="Cambria" pitchFamily="34" charset="-122"/>
+                <a:cs typeface="Cambria" pitchFamily="34" charset="-120"/>
+              </a:rPr>
+              <a:t>$2.1–3.0bn, 2007–2010</a:t>
+            </a:r>
+            <a:endParaRPr lang="en-US" sz="1600" dirty="0"/>
+          </a:p>
+        </p:txBody>
+      </p:sp>
+      <p:sp>
+        <p:nvSpPr>
+          <p:cNvPr id="16" name="Card text"/>
+          <p:cNvSpPr txBox="1"/>
+          <p:nvPr/>
+        </p:nvSpPr>
+        <p:spPr>
+          <a:xfrm>
+            <a:off x="8310677" y="2798064"/>
+            <a:ext cx="3149498" cy="868680"/>
+          </a:xfrm>
+          <a:prstGeom prst="rect">
+            <a:avLst/>
+          </a:prstGeom>
+          <a:noFill/>
+          <a:ln/>
+        </p:spPr>
+        <p:txBody>
+          <a:bodyPr wrap="square" lIns="0" tIns="0" rIns="0" bIns="0" rtlCol="0" anchor="t"/>
+          <a:lstStyle/>
+          <a:p>
+            <a:pPr indent="0" marL="0">
+              <a:buNone/>
+            </a:pPr>
+            <a:r>
+              <a:rPr lang="en-US" sz="1300" dirty="0">
+                <a:solidFill>
+                  <a:schemeClr val="bg2"/>
+                </a:solidFill>
+              </a:rPr>
+              <a:t>MISO's estimate of regional savings, counting all its benefits; the 2011 Franz Edelman Award.</a:t>
+            </a:r>
+            <a:endParaRPr lang="en-US" sz="1300" dirty="0"/>
+          </a:p>
+        </p:txBody>
+      </p:sp>
+      <p:sp>
+        <p:nvSpPr>
+          <p:cNvPr id="17" name="Card"/>
+          <p:cNvSpPr/>
+          <p:nvPr/>
+        </p:nvSpPr>
+        <p:spPr>
+          <a:xfrm>
+            <a:off x="548640" y="4069080"/>
+            <a:ext cx="3515258" cy="2103120"/>
+          </a:xfrm>
+          <a:prstGeom prst="roundRect">
+            <a:avLst>
+              <a:gd name="adj" fmla="val 3478"/>
+            </a:avLst>
+          </a:prstGeom>
+          <a:solidFill>
+            <a:schemeClr val="bg2"/>
+          </a:solidFill>
+          <a:ln w="9525">
+            <a:solidFill>
+              <a:srgbClr val="C4CBD8"/>
+            </a:solidFill>
+            <a:prstDash val="solid"/>
+          </a:ln>
+        </p:spPr>
+      </p:sp>
+      <p:sp>
+        <p:nvSpPr>
+          <p:cNvPr id="18" name="Card label"/>
+          <p:cNvSpPr txBox="1"/>
+          <p:nvPr/>
+        </p:nvSpPr>
+        <p:spPr>
+          <a:xfrm>
+            <a:off x="731520" y="4197096"/>
+            <a:ext cx="3149498" cy="310896"/>
+          </a:xfrm>
+          <a:prstGeom prst="rect">
+            <a:avLst/>
+          </a:prstGeom>
+          <a:noFill/>
+          <a:ln/>
+        </p:spPr>
+        <p:txBody>
+          <a:bodyPr wrap="square" lIns="0" tIns="0" rIns="0" bIns="0" rtlCol="0" anchor="ctr"/>
+          <a:lstStyle/>
+          <a:p>
+            <a:pPr indent="0" marL="0">
+              <a:buNone/>
+            </a:pPr>
+            <a:r>
+              <a:rPr lang="en-US" sz="1300" b="1" dirty="0">
+                <a:solidFill>
+                  <a:schemeClr val="accent1"/>
+                </a:solidFill>
+              </a:rPr>
+              <a:t>Making it work</a:t>
+            </a:r>
+            <a:endParaRPr lang="en-US" sz="1300" dirty="0"/>
+          </a:p>
+        </p:txBody>
+      </p:sp>
+      <p:sp>
+        <p:nvSpPr>
+          <p:cNvPr id="19" name="Card head"/>
+          <p:cNvSpPr txBox="1"/>
+          <p:nvPr/>
+        </p:nvSpPr>
+        <p:spPr>
+          <a:xfrm>
+            <a:off x="731520" y="4526280"/>
+            <a:ext cx="3149498" cy="576072"/>
+          </a:xfrm>
+          <a:prstGeom prst="rect">
+            <a:avLst/>
+          </a:prstGeom>
+          <a:noFill/>
+          <a:ln/>
+        </p:spPr>
+        <p:txBody>
+          <a:bodyPr wrap="square" lIns="0" tIns="0" rIns="0" bIns="0" rtlCol="0" anchor="t"/>
+          <a:lstStyle/>
+          <a:p>
+            <a:pPr indent="0" marL="0">
+              <a:buNone/>
+            </a:pPr>
+            <a:r>
+              <a:rPr lang="en-US" sz="1600" b="1" dirty="0">
+                <a:solidFill>
+                  <a:schemeClr val="tx1"/>
+                </a:solidFill>
+                <a:latin typeface="Cambria" pitchFamily="34" charset="0"/>
+                <a:ea typeface="Cambria" pitchFamily="34" charset="-122"/>
+                <a:cs typeface="Cambria" pitchFamily="34" charset="-120"/>
+              </a:rPr>
+              <a:t>Against the clock</a:t>
+            </a:r>
+            <a:endParaRPr lang="en-US" sz="1600" dirty="0"/>
+          </a:p>
+        </p:txBody>
+      </p:sp>
+      <p:sp>
+        <p:nvSpPr>
+          <p:cNvPr id="20" name="Card text"/>
+          <p:cNvSpPr txBox="1"/>
+          <p:nvPr/>
+        </p:nvSpPr>
+        <p:spPr>
+          <a:xfrm>
+            <a:off x="731520" y="5175504"/>
+            <a:ext cx="3149498" cy="868680"/>
+          </a:xfrm>
+          <a:prstGeom prst="rect">
+            <a:avLst/>
+          </a:prstGeom>
+          <a:noFill/>
+          <a:ln/>
+        </p:spPr>
+        <p:txBody>
+          <a:bodyPr wrap="square" lIns="0" tIns="0" rIns="0" bIns="0" rtlCol="0" anchor="t"/>
+          <a:lstStyle/>
+          <a:p>
+            <a:pPr indent="0" marL="0">
+              <a:buNone/>
+            </a:pPr>
+            <a:r>
+              <a:rPr lang="en-US" sz="1300" dirty="0">
+                <a:solidFill>
+                  <a:schemeClr val="tx2"/>
+                </a:solidFill>
+              </a:rPr>
+              <a:t>Day-ahead commitment within 1,200 seconds and a 0.1 percent gap; Extended LMP brought commitment costs into prices from 2015.</a:t>
+            </a:r>
+            <a:endParaRPr lang="en-US" sz="1300" dirty="0"/>
+          </a:p>
+        </p:txBody>
+      </p:sp>
+      <p:sp>
+        <p:nvSpPr>
+          <p:cNvPr id="21" name="Card"/>
+          <p:cNvSpPr/>
+          <p:nvPr/>
+        </p:nvSpPr>
+        <p:spPr>
+          <a:xfrm>
+            <a:off x="4338218" y="4069080"/>
+            <a:ext cx="3515258" cy="2103120"/>
+          </a:xfrm>
+          <a:prstGeom prst="roundRect">
+            <a:avLst>
+              <a:gd name="adj" fmla="val 3478"/>
+            </a:avLst>
+          </a:prstGeom>
+          <a:solidFill>
+            <a:schemeClr val="bg2"/>
+          </a:solidFill>
+          <a:ln w="9525">
+            <a:solidFill>
+              <a:srgbClr val="C4CBD8"/>
+            </a:solidFill>
+            <a:prstDash val="solid"/>
+          </a:ln>
+        </p:spPr>
+      </p:sp>
+      <p:sp>
+        <p:nvSpPr>
+          <p:cNvPr id="22" name="Card label"/>
+          <p:cNvSpPr txBox="1"/>
+          <p:nvPr/>
+        </p:nvSpPr>
+        <p:spPr>
+          <a:xfrm>
+            <a:off x="4521098" y="4197096"/>
+            <a:ext cx="3149498" cy="310896"/>
+          </a:xfrm>
+          <a:prstGeom prst="rect">
+            <a:avLst/>
+          </a:prstGeom>
+          <a:noFill/>
+          <a:ln/>
+        </p:spPr>
+        <p:txBody>
+          <a:bodyPr wrap="square" lIns="0" tIns="0" rIns="0" bIns="0" rtlCol="0" anchor="ctr"/>
+          <a:lstStyle/>
+          <a:p>
+            <a:pPr indent="0" marL="0">
+              <a:buNone/>
+            </a:pPr>
+            <a:r>
+              <a:rPr lang="en-US" sz="1300" b="1" dirty="0">
+                <a:solidFill>
+                  <a:schemeClr val="accent1"/>
+                </a:solidFill>
+              </a:rPr>
+              <a:t>What Meridian takes</a:t>
+            </a:r>
+            <a:endParaRPr lang="en-US" sz="1300" dirty="0"/>
+          </a:p>
+        </p:txBody>
+      </p:sp>
+      <p:sp>
+        <p:nvSpPr>
+          <p:cNvPr id="23" name="Card head"/>
+          <p:cNvSpPr txBox="1"/>
+          <p:nvPr/>
+        </p:nvSpPr>
+        <p:spPr>
+          <a:xfrm>
+            <a:off x="4521098" y="4526280"/>
+            <a:ext cx="3149498" cy="576072"/>
+          </a:xfrm>
+          <a:prstGeom prst="rect">
+            <a:avLst/>
+          </a:prstGeom>
+          <a:noFill/>
+          <a:ln/>
+        </p:spPr>
+        <p:txBody>
+          <a:bodyPr wrap="square" lIns="0" tIns="0" rIns="0" bIns="0" rtlCol="0" anchor="t"/>
+          <a:lstStyle/>
+          <a:p>
+            <a:pPr indent="0" marL="0">
+              <a:buNone/>
+            </a:pPr>
+            <a:r>
+              <a:rPr lang="en-US" sz="1600" b="1" dirty="0">
+                <a:solidFill>
+                  <a:schemeClr val="tx1"/>
+                </a:solidFill>
+                <a:latin typeface="Cambria" pitchFamily="34" charset="0"/>
+                <a:ea typeface="Cambria" pitchFamily="34" charset="-122"/>
+                <a:cs typeface="Cambria" pitchFamily="34" charset="-120"/>
+              </a:rPr>
+              <a:t>Prices anyone can check</a:t>
+            </a:r>
+            <a:endParaRPr lang="en-US" sz="1600" dirty="0"/>
+          </a:p>
+        </p:txBody>
+      </p:sp>
+      <p:sp>
+        <p:nvSpPr>
+          <p:cNvPr id="24" name="Card text"/>
+          <p:cNvSpPr txBox="1"/>
+          <p:nvPr/>
+        </p:nvSpPr>
+        <p:spPr>
+          <a:xfrm>
+            <a:off x="4521098" y="5175504"/>
+            <a:ext cx="3149498" cy="868680"/>
+          </a:xfrm>
+          <a:prstGeom prst="rect">
+            <a:avLst/>
+          </a:prstGeom>
+          <a:noFill/>
+          <a:ln/>
+        </p:spPr>
+        <p:txBody>
+          <a:bodyPr wrap="square" lIns="0" tIns="0" rIns="0" bIns="0" rtlCol="0" anchor="t"/>
+          <a:lstStyle/>
+          <a:p>
+            <a:pPr indent="0" marL="0">
+              <a:buNone/>
+            </a:pPr>
+            <a:r>
+              <a:rPr lang="en-US" sz="1300" dirty="0">
+                <a:solidFill>
+                  <a:schemeClr val="tx2"/>
+                </a:solidFill>
+              </a:rPr>
+              <a:t>Worked Example 3.1 read the prices of Meridian's commitments from the same conditions.</a:t>
+            </a:r>
+            <a:endParaRPr lang="en-US" sz="1300" dirty="0"/>
+          </a:p>
+        </p:txBody>
+      </p:sp>
+      <p:sp>
+        <p:nvSpPr>
+          <p:cNvPr id="25" name="Card"/>
+          <p:cNvSpPr/>
+          <p:nvPr/>
+        </p:nvSpPr>
+        <p:spPr>
+          <a:xfrm>
+            <a:off x="8127797" y="4069080"/>
+            <a:ext cx="3515258" cy="2103120"/>
+          </a:xfrm>
+          <a:prstGeom prst="roundRect">
+            <a:avLst>
+              <a:gd name="adj" fmla="val 3478"/>
+            </a:avLst>
+          </a:prstGeom>
+          <a:solidFill>
+            <a:schemeClr val="bg2"/>
+          </a:solidFill>
+          <a:ln w="9525">
+            <a:solidFill>
+              <a:srgbClr val="C4CBD8"/>
+            </a:solidFill>
+            <a:prstDash val="solid"/>
+          </a:ln>
+        </p:spPr>
+      </p:sp>
+      <p:sp>
+        <p:nvSpPr>
+          <p:cNvPr id="26" name="Card label"/>
+          <p:cNvSpPr txBox="1"/>
+          <p:nvPr/>
+        </p:nvSpPr>
+        <p:spPr>
+          <a:xfrm>
+            <a:off x="8310677" y="4197096"/>
+            <a:ext cx="3149498" cy="310896"/>
+          </a:xfrm>
+          <a:prstGeom prst="rect">
+            <a:avLst/>
+          </a:prstGeom>
+          <a:noFill/>
+          <a:ln/>
+        </p:spPr>
+        <p:txBody>
+          <a:bodyPr wrap="square" lIns="0" tIns="0" rIns="0" bIns="0" rtlCol="0" anchor="ctr"/>
+          <a:lstStyle/>
+          <a:p>
+            <a:pPr indent="0" marL="0">
+              <a:buNone/>
+            </a:pPr>
+            <a:r>
+              <a:rPr lang="en-US" sz="1300" b="1" dirty="0">
+                <a:solidFill>
+                  <a:schemeClr val="accent1"/>
+                </a:solidFill>
+              </a:rPr>
+              <a:t>For the board</a:t>
+            </a:r>
+            <a:endParaRPr lang="en-US" sz="1300" dirty="0"/>
+          </a:p>
+        </p:txBody>
+      </p:sp>
+      <p:sp>
+        <p:nvSpPr>
+          <p:cNvPr id="27" name="Card head"/>
+          <p:cNvSpPr txBox="1"/>
+          <p:nvPr/>
+        </p:nvSpPr>
+        <p:spPr>
+          <a:xfrm>
+            <a:off x="8310677" y="4526280"/>
+            <a:ext cx="3149498" cy="576072"/>
+          </a:xfrm>
+          <a:prstGeom prst="rect">
+            <a:avLst/>
+          </a:prstGeom>
+          <a:noFill/>
+          <a:ln/>
+        </p:spPr>
+        <p:txBody>
+          <a:bodyPr wrap="square" lIns="0" tIns="0" rIns="0" bIns="0" rtlCol="0" anchor="t"/>
+          <a:lstStyle/>
+          <a:p>
+            <a:pPr indent="0" marL="0">
+              <a:buNone/>
+            </a:pPr>
+            <a:r>
+              <a:rPr lang="en-US" sz="1600" b="1" dirty="0">
+                <a:solidFill>
+                  <a:schemeClr val="tx1"/>
+                </a:solidFill>
+                <a:latin typeface="Cambria" pitchFamily="34" charset="0"/>
+                <a:ea typeface="Cambria" pitchFamily="34" charset="-122"/>
+                <a:cs typeface="Cambria" pitchFamily="34" charset="-120"/>
+              </a:rPr>
+              <a:t>Which benefits did the model produce?</a:t>
+            </a:r>
+            <a:endParaRPr lang="en-US" sz="1600" dirty="0"/>
+          </a:p>
+        </p:txBody>
+      </p:sp>
+      <p:sp>
+        <p:nvSpPr>
+          <p:cNvPr id="28" name="Card text"/>
+          <p:cNvSpPr txBox="1"/>
+          <p:nvPr/>
+        </p:nvSpPr>
+        <p:spPr>
+          <a:xfrm>
+            <a:off x="8310677" y="5175504"/>
+            <a:ext cx="3149498" cy="868680"/>
+          </a:xfrm>
+          <a:prstGeom prst="rect">
+            <a:avLst/>
+          </a:prstGeom>
+          <a:noFill/>
+          <a:ln/>
+        </p:spPr>
+        <p:txBody>
+          <a:bodyPr wrap="square" lIns="0" tIns="0" rIns="0" bIns="0" rtlCol="0" anchor="t"/>
+          <a:lstStyle/>
+          <a:p>
+            <a:pPr indent="0" marL="0">
+              <a:buNone/>
+            </a:pPr>
+            <a:r>
+              <a:rPr lang="en-US" sz="1300" dirty="0">
+                <a:solidFill>
+                  <a:schemeClr val="tx2"/>
+                </a:solidFill>
+              </a:rPr>
+              <a:t>MISO's value study counts all its regional benefits, not the optimization alone.</a:t>
+            </a:r>
+            <a:endParaRPr lang="en-US" sz="1300" dirty="0"/>
           </a:p>
         </p:txBody>
       </p:sp>
@@ -16364,7 +16437,7 @@
                   <a:schemeClr val="accent1"/>
                 </a:solidFill>
               </a:rPr>
-              <a:t>KEY TAKEAWAYS</a:t>
+              <a:t>AXIOM LAB 2.3 · MODULE AXIOM-03</a:t>
             </a:r>
             <a:endParaRPr lang="en-US" sz="1200" dirty="0"/>
           </a:p>
@@ -16405,22 +16478,105 @@
                 <a:ea typeface="Cambria" pitchFamily="34" charset="-122"/>
                 <a:cs typeface="Cambria" pitchFamily="34" charset="-120"/>
               </a:rPr>
-              <a:t>What to carry forward</a:t>
+              <a:t>Ceilings and price lists, in AXIOM</a:t>
             </a:r>
             <a:endParaRPr lang="en-US" sz="3200" dirty="0"/>
           </a:p>
         </p:txBody>
       </p:sp>
-      <p:sp>
-        <p:nvSpPr>
-          <p:cNvPr id="5" name="Number"/>
+      <p:pic>
+        <p:nvPicPr>
+          <p:cNvPr id="5" name="AXIOM logo" descr="AXIOM">    </p:cNvPr>
+          <p:cNvPicPr>
+            <a:picLocks noChangeAspect="1"/>
+          </p:cNvPicPr>
+          <p:nvPr/>
+        </p:nvPicPr>
+        <p:blipFill>
+          <a:blip r:embed="rId1"/>
+          <a:stretch>
+            <a:fillRect/>
+          </a:stretch>
+        </p:blipFill>
+        <p:spPr>
+          <a:xfrm>
+            <a:off x="9539935" y="310896"/>
+            <a:ext cx="2103120" cy="420624"/>
+          </a:xfrm>
+          <a:prstGeom prst="rect">
+            <a:avLst/>
+          </a:prstGeom>
+        </p:spPr>
+      </p:pic>
+      <p:sp>
+        <p:nvSpPr>
+          <p:cNvPr id="6" name="Situation"/>
+          <p:cNvSpPr txBox="1"/>
+          <p:nvPr/>
+        </p:nvSpPr>
+        <p:spPr>
+          <a:xfrm>
+            <a:off x="548640" y="1645920"/>
+            <a:ext cx="11094415" cy="777240"/>
+          </a:xfrm>
+          <a:prstGeom prst="rect">
+            <a:avLst/>
+          </a:prstGeom>
+          <a:noFill/>
+          <a:ln/>
+        </p:spPr>
+        <p:txBody>
+          <a:bodyPr wrap="square" lIns="0" tIns="0" rIns="0" bIns="0" rtlCol="0" anchor="t"/>
+          <a:lstStyle/>
+          <a:p>
+            <a:pPr indent="0" marL="0">
+              <a:buNone/>
+            </a:pPr>
+            <a:r>
+              <a:rPr lang="en-US" sz="1500" dirty="0">
+                <a:solidFill>
+                  <a:schemeClr val="tx1"/>
+                </a:solidFill>
+              </a:rPr>
+              <a:t>Meridian's chief risk officer wants a ceiling on the value of any automation plan, computed without enumeration, and a price list the board can audit. Open AXIOM, choose Lab 2.3 and load the Meridian automation relaxation.</a:t>
+            </a:r>
+            <a:endParaRPr lang="en-US" sz="1500" dirty="0"/>
+          </a:p>
+        </p:txBody>
+      </p:sp>
+      <p:sp>
+        <p:nvSpPr>
+          <p:cNvPr id="7" name="Flow line"/>
           <p:cNvSpPr/>
           <p:nvPr/>
         </p:nvSpPr>
         <p:spPr>
           <a:xfrm>
-            <a:off x="548640" y="1737360"/>
-            <a:ext cx="566928" cy="566928"/>
+            <a:off x="1658082" y="2880360"/>
+            <a:ext cx="8875532" cy="0"/>
+          </a:xfrm>
+          <a:prstGeom prst="line">
+            <a:avLst/>
+          </a:prstGeom>
+          <a:noFill/>
+          <a:ln w="25400">
+            <a:solidFill>
+              <a:srgbClr val="C4CBD8"/>
+            </a:solidFill>
+            <a:prstDash val="solid"/>
+          </a:ln>
+        </p:spPr>
+      </p:sp>
+      <p:sp>
+        <p:nvSpPr>
+          <p:cNvPr id="8" name="Number"/>
+          <p:cNvSpPr/>
+          <p:nvPr/>
+        </p:nvSpPr>
+        <p:spPr>
+          <a:xfrm>
+            <a:off x="1383762" y="2606040"/>
+            <a:ext cx="548640" cy="548640"/>
           </a:xfrm>
           <a:prstGeom prst="ellipse">
             <a:avLst/>
@@ -16438,14 +16594,14 @@
       </p:sp>
       <p:sp>
         <p:nvSpPr>
-          <p:cNvPr id="6" name="Text 3"/>
+          <p:cNvPr id="9" name="Text 5"/>
           <p:cNvSpPr txBox="1"/>
           <p:nvPr/>
         </p:nvSpPr>
         <p:spPr>
           <a:xfrm>
-            <a:off x="548640" y="1737360"/>
-            <a:ext cx="566928" cy="566928"/>
+            <a:off x="1383762" y="2606040"/>
+            <a:ext cx="548640" cy="548640"/>
           </a:xfrm>
           <a:prstGeom prst="rect">
             <a:avLst/>
@@ -16461,7 +16617,7 @@
               <a:buNone/>
             </a:pPr>
             <a:r>
-              <a:rPr lang="en-US" sz="1500" b="1" dirty="0">
+              <a:rPr lang="en-US" sz="1600" b="1" dirty="0">
                 <a:solidFill>
                   <a:schemeClr val="bg1"/>
                 </a:solidFill>
@@ -16471,20 +16627,20 @@
               </a:rPr>
               <a:t>1</a:t>
             </a:r>
-            <a:endParaRPr lang="en-US" sz="1500" dirty="0"/>
-          </a:p>
-        </p:txBody>
-      </p:sp>
-      <p:sp>
-        <p:nvSpPr>
-          <p:cNvPr id="7" name="Row text"/>
+            <a:endParaRPr lang="en-US" sz="1600" dirty="0"/>
+          </a:p>
+        </p:txBody>
+      </p:sp>
+      <p:sp>
+        <p:nvSpPr>
+          <p:cNvPr id="10" name="Flow head"/>
           <p:cNvSpPr txBox="1"/>
           <p:nvPr/>
         </p:nvSpPr>
         <p:spPr>
           <a:xfrm>
-            <a:off x="1325880" y="1691640"/>
-            <a:ext cx="10317175" cy="841248"/>
+            <a:off x="621792" y="3291840"/>
+            <a:ext cx="2072579" cy="548640"/>
           </a:xfrm>
           <a:prstGeom prst="rect">
             <a:avLst/>
@@ -16493,34 +16649,73 @@
           <a:ln/>
         </p:spPr>
         <p:txBody>
-          <a:bodyPr wrap="square" lIns="0" tIns="0" rIns="0" bIns="0" rtlCol="0" anchor="ctr"/>
+          <a:bodyPr wrap="square" lIns="0" tIns="0" rIns="0" bIns="0" rtlCol="0" anchor="t"/>
           <a:lstStyle/>
           <a:p>
-            <a:pPr indent="0" marL="0">
+            <a:pPr algn="ctr" indent="0" marL="0">
               <a:buNone/>
             </a:pPr>
             <a:r>
-              <a:rPr lang="en-US" sz="1500" dirty="0">
+              <a:rPr lang="en-US" sz="1600" b="1" dirty="0">
                 <a:solidFill>
                   <a:schemeClr val="tx1"/>
                 </a:solidFill>
-              </a:rPr>
-              <a:t>Convexity turns optimization into proof: in a convex instance local answers are global, best plans form a menu, and curvature makes the best plan unique and near-best plans near.</a:t>
-            </a:r>
-            <a:endParaRPr lang="en-US" sz="1500" dirty="0"/>
-          </a:p>
-        </p:txBody>
-      </p:sp>
-      <p:sp>
-        <p:nvSpPr>
-          <p:cNvPr id="8" name="Number"/>
+                <a:latin typeface="Cambria" pitchFamily="34" charset="0"/>
+                <a:ea typeface="Cambria" pitchFamily="34" charset="-122"/>
+                <a:cs typeface="Cambria" pitchFamily="34" charset="-120"/>
+              </a:rPr>
+              <a:t>Recognize</a:t>
+            </a:r>
+            <a:endParaRPr lang="en-US" sz="1600" dirty="0"/>
+          </a:p>
+        </p:txBody>
+      </p:sp>
+      <p:sp>
+        <p:nvSpPr>
+          <p:cNvPr id="11" name="Flow text"/>
+          <p:cNvSpPr txBox="1"/>
+          <p:nvPr/>
+        </p:nvSpPr>
+        <p:spPr>
+          <a:xfrm>
+            <a:off x="640080" y="3867912"/>
+            <a:ext cx="2036003" cy="1554480"/>
+          </a:xfrm>
+          <a:prstGeom prst="rect">
+            <a:avLst/>
+          </a:prstGeom>
+          <a:noFill/>
+          <a:ln/>
+        </p:spPr>
+        <p:txBody>
+          <a:bodyPr wrap="square" lIns="0" tIns="0" rIns="0" bIns="0" rtlCol="0" anchor="t"/>
+          <a:lstStyle/>
+          <a:p>
+            <a:pPr algn="ctr" indent="0" marL="0">
+              <a:buNone/>
+            </a:pPr>
+            <a:r>
+              <a:rPr lang="en-US" sz="1400" dirty="0">
+                <a:solidFill>
+                  <a:schemeClr val="tx2"/>
+                </a:solidFill>
+              </a:rPr>
+              <a:t>Enter the program in both forms; check they agree at the 64 lumpy plans; find the violating chord.</a:t>
+            </a:r>
+            <a:endParaRPr lang="en-US" sz="1400" dirty="0"/>
+          </a:p>
+        </p:txBody>
+      </p:sp>
+      <p:sp>
+        <p:nvSpPr>
+          <p:cNvPr id="12" name="Number"/>
           <p:cNvSpPr/>
           <p:nvPr/>
         </p:nvSpPr>
         <p:spPr>
           <a:xfrm>
-            <a:off x="548640" y="2633472"/>
-            <a:ext cx="566928" cy="566928"/>
+            <a:off x="3602645" y="2606040"/>
+            <a:ext cx="548640" cy="548640"/>
           </a:xfrm>
           <a:prstGeom prst="ellipse">
             <a:avLst/>
@@ -16538,14 +16733,14 @@
       </p:sp>
       <p:sp>
         <p:nvSpPr>
-          <p:cNvPr id="9" name="Text 6"/>
+          <p:cNvPr id="13" name="Text 9"/>
           <p:cNvSpPr txBox="1"/>
           <p:nvPr/>
         </p:nvSpPr>
         <p:spPr>
           <a:xfrm>
-            <a:off x="548640" y="2633472"/>
-            <a:ext cx="566928" cy="566928"/>
+            <a:off x="3602645" y="2606040"/>
+            <a:ext cx="548640" cy="548640"/>
           </a:xfrm>
           <a:prstGeom prst="rect">
             <a:avLst/>
@@ -16561,7 +16756,7 @@
               <a:buNone/>
             </a:pPr>
             <a:r>
-              <a:rPr lang="en-US" sz="1500" b="1" dirty="0">
+              <a:rPr lang="en-US" sz="1600" b="1" dirty="0">
                 <a:solidFill>
                   <a:schemeClr val="bg1"/>
                 </a:solidFill>
@@ -16571,20 +16766,20 @@
               </a:rPr>
               <a:t>2</a:t>
             </a:r>
-            <a:endParaRPr lang="en-US" sz="1500" dirty="0"/>
-          </a:p>
-        </p:txBody>
-      </p:sp>
-      <p:sp>
-        <p:nvSpPr>
-          <p:cNvPr id="10" name="Row text"/>
+            <a:endParaRPr lang="en-US" sz="1600" dirty="0"/>
+          </a:p>
+        </p:txBody>
+      </p:sp>
+      <p:sp>
+        <p:nvSpPr>
+          <p:cNvPr id="14" name="Flow head"/>
           <p:cNvSpPr txBox="1"/>
           <p:nvPr/>
         </p:nvSpPr>
         <p:spPr>
           <a:xfrm>
-            <a:off x="1325880" y="2587752"/>
-            <a:ext cx="10317175" cy="841248"/>
+            <a:off x="2840675" y="3291840"/>
+            <a:ext cx="2072579" cy="548640"/>
           </a:xfrm>
           <a:prstGeom prst="rect">
             <a:avLst/>
@@ -16593,34 +16788,73 @@
           <a:ln/>
         </p:spPr>
         <p:txBody>
-          <a:bodyPr wrap="square" lIns="0" tIns="0" rIns="0" bIns="0" rtlCol="0" anchor="ctr"/>
+          <a:bodyPr wrap="square" lIns="0" tIns="0" rIns="0" bIns="0" rtlCol="0" anchor="t"/>
           <a:lstStyle/>
           <a:p>
-            <a:pPr indent="0" marL="0">
+            <a:pPr algn="ctr" indent="0" marL="0">
               <a:buNone/>
             </a:pPr>
             <a:r>
-              <a:rPr lang="en-US" sz="1500" dirty="0">
+              <a:rPr lang="en-US" sz="1600" b="1" dirty="0">
                 <a:solidFill>
                   <a:schemeClr val="tx1"/>
                 </a:solidFill>
-              </a:rPr>
-              <a:t>Convexity is recognized block by block from a catalog of shapes and rules; it breaks at set-up charges, all-or-nothing choices, products of decisions, and commitments that hold a concave quantity below a ceiling.</a:t>
-            </a:r>
-            <a:endParaRPr lang="en-US" sz="1500" dirty="0"/>
-          </a:p>
-        </p:txBody>
-      </p:sp>
-      <p:sp>
-        <p:nvSpPr>
-          <p:cNvPr id="11" name="Number"/>
+                <a:latin typeface="Cambria" pitchFamily="34" charset="0"/>
+                <a:ea typeface="Cambria" pitchFamily="34" charset="-122"/>
+                <a:cs typeface="Cambria" pitchFamily="34" charset="-120"/>
+              </a:rPr>
+              <a:t>Solve</a:t>
+            </a:r>
+            <a:endParaRPr lang="en-US" sz="1600" dirty="0"/>
+          </a:p>
+        </p:txBody>
+      </p:sp>
+      <p:sp>
+        <p:nvSpPr>
+          <p:cNvPr id="15" name="Flow text"/>
+          <p:cNvSpPr txBox="1"/>
+          <p:nvPr/>
+        </p:nvSpPr>
+        <p:spPr>
+          <a:xfrm>
+            <a:off x="2858963" y="3867912"/>
+            <a:ext cx="2036003" cy="1554480"/>
+          </a:xfrm>
+          <a:prstGeom prst="rect">
+            <a:avLst/>
+          </a:prstGeom>
+          <a:noFill/>
+          <a:ln/>
+        </p:spPr>
+        <p:txBody>
+          <a:bodyPr wrap="square" lIns="0" tIns="0" rIns="0" bIns="0" rtlCol="0" anchor="t"/>
+          <a:lstStyle/>
+          <a:p>
+            <a:pPr algn="ctr" indent="0" marL="0">
+              <a:buNone/>
+            </a:pPr>
+            <a:r>
+              <a:rPr lang="en-US" sz="1400" dirty="0">
+                <a:solidFill>
+                  <a:schemeClr val="tx2"/>
+                </a:solidFill>
+              </a:rPr>
+              <a:t>Declare the relaxation in disciplined convex form, solve it, and watch the duality gap close.</a:t>
+            </a:r>
+            <a:endParaRPr lang="en-US" sz="1400" dirty="0"/>
+          </a:p>
+        </p:txBody>
+      </p:sp>
+      <p:sp>
+        <p:nvSpPr>
+          <p:cNvPr id="16" name="Number"/>
           <p:cNvSpPr/>
           <p:nvPr/>
         </p:nvSpPr>
         <p:spPr>
           <a:xfrm>
-            <a:off x="548640" y="3529584"/>
-            <a:ext cx="566928" cy="566928"/>
+            <a:off x="5821528" y="2606040"/>
+            <a:ext cx="548640" cy="548640"/>
           </a:xfrm>
           <a:prstGeom prst="ellipse">
             <a:avLst/>
@@ -16638,14 +16872,14 @@
       </p:sp>
       <p:sp>
         <p:nvSpPr>
-          <p:cNvPr id="12" name="Text 9"/>
+          <p:cNvPr id="17" name="Text 13"/>
           <p:cNvSpPr txBox="1"/>
           <p:nvPr/>
         </p:nvSpPr>
         <p:spPr>
           <a:xfrm>
-            <a:off x="548640" y="3529584"/>
-            <a:ext cx="566928" cy="566928"/>
+            <a:off x="5821528" y="2606040"/>
+            <a:ext cx="548640" cy="548640"/>
           </a:xfrm>
           <a:prstGeom prst="rect">
             <a:avLst/>
@@ -16661,7 +16895,7 @@
               <a:buNone/>
             </a:pPr>
             <a:r>
-              <a:rPr lang="en-US" sz="1500" b="1" dirty="0">
+              <a:rPr lang="en-US" sz="1600" b="1" dirty="0">
                 <a:solidFill>
                   <a:schemeClr val="bg1"/>
                 </a:solidFill>
@@ -16671,20 +16905,20 @@
               </a:rPr>
               <a:t>3</a:t>
             </a:r>
-            <a:endParaRPr lang="en-US" sz="1500" dirty="0"/>
-          </a:p>
-        </p:txBody>
-      </p:sp>
-      <p:sp>
-        <p:nvSpPr>
-          <p:cNvPr id="13" name="Row text"/>
+            <a:endParaRPr lang="en-US" sz="1600" dirty="0"/>
+          </a:p>
+        </p:txBody>
+      </p:sp>
+      <p:sp>
+        <p:nvSpPr>
+          <p:cNvPr id="18" name="Flow head"/>
           <p:cNvSpPr txBox="1"/>
           <p:nvPr/>
         </p:nvSpPr>
         <p:spPr>
           <a:xfrm>
-            <a:off x="1325880" y="3483864"/>
-            <a:ext cx="10317175" cy="841248"/>
+            <a:off x="5059558" y="3291840"/>
+            <a:ext cx="2072579" cy="548640"/>
           </a:xfrm>
           <a:prstGeom prst="rect">
             <a:avLst/>
@@ -16693,34 +16927,73 @@
           <a:ln/>
         </p:spPr>
         <p:txBody>
-          <a:bodyPr wrap="square" lIns="0" tIns="0" rIns="0" bIns="0" rtlCol="0" anchor="ctr"/>
+          <a:bodyPr wrap="square" lIns="0" tIns="0" rIns="0" bIns="0" rtlCol="0" anchor="t"/>
           <a:lstStyle/>
           <a:p>
-            <a:pPr indent="0" marL="0">
+            <a:pPr algn="ctr" indent="0" marL="0">
               <a:buNone/>
             </a:pPr>
             <a:r>
-              <a:rPr lang="en-US" sz="1500" dirty="0">
+              <a:rPr lang="en-US" sz="1600" b="1" dirty="0">
                 <a:solidFill>
                   <a:schemeClr val="tx1"/>
                 </a:solidFill>
-              </a:rPr>
-              <a:t>Duality turns commitments into prices: any price list gives a ceiling on value, and under Slater's condition the best price list closes the gap, so a plan and its prices certify each other.</a:t>
-            </a:r>
-            <a:endParaRPr lang="en-US" sz="1500" dirty="0"/>
-          </a:p>
-        </p:txBody>
-      </p:sp>
-      <p:sp>
-        <p:nvSpPr>
-          <p:cNvPr id="14" name="Number"/>
+                <a:latin typeface="Cambria" pitchFamily="34" charset="0"/>
+                <a:ea typeface="Cambria" pitchFamily="34" charset="-122"/>
+                <a:cs typeface="Cambria" pitchFamily="34" charset="-120"/>
+              </a:rPr>
+              <a:t>Audit</a:t>
+            </a:r>
+            <a:endParaRPr lang="en-US" sz="1600" dirty="0"/>
+          </a:p>
+        </p:txBody>
+      </p:sp>
+      <p:sp>
+        <p:nvSpPr>
+          <p:cNvPr id="19" name="Flow text"/>
+          <p:cNvSpPr txBox="1"/>
+          <p:nvPr/>
+        </p:nvSpPr>
+        <p:spPr>
+          <a:xfrm>
+            <a:off x="5077846" y="3867912"/>
+            <a:ext cx="2036003" cy="1554480"/>
+          </a:xfrm>
+          <a:prstGeom prst="rect">
+            <a:avLst/>
+          </a:prstGeom>
+          <a:noFill/>
+          <a:ln/>
+        </p:spPr>
+        <p:txBody>
+          <a:bodyPr wrap="square" lIns="0" tIns="0" rIns="0" bIns="0" rtlCol="0" anchor="t"/>
+          <a:lstStyle/>
+          <a:p>
+            <a:pPr algn="ctr" indent="0" marL="0">
+              <a:buNone/>
+            </a:pPr>
+            <a:r>
+              <a:rPr lang="en-US" sz="1400" dirty="0">
+                <a:solidFill>
+                  <a:schemeClr val="tx2"/>
+                </a:solidFill>
+              </a:rPr>
+              <a:t>Run the KKT verification module; rebuild the marginal values and prices of Figure 3.3(a).</a:t>
+            </a:r>
+            <a:endParaRPr lang="en-US" sz="1400" dirty="0"/>
+          </a:p>
+        </p:txBody>
+      </p:sp>
+      <p:sp>
+        <p:nvSpPr>
+          <p:cNvPr id="20" name="Number"/>
           <p:cNvSpPr/>
           <p:nvPr/>
         </p:nvSpPr>
         <p:spPr>
           <a:xfrm>
-            <a:off x="548640" y="4425696"/>
-            <a:ext cx="566928" cy="566928"/>
+            <a:off x="8040411" y="2606040"/>
+            <a:ext cx="548640" cy="548640"/>
           </a:xfrm>
           <a:prstGeom prst="ellipse">
             <a:avLst/>
@@ -16738,14 +17011,14 @@
       </p:sp>
       <p:sp>
         <p:nvSpPr>
-          <p:cNvPr id="15" name="Text 12"/>
+          <p:cNvPr id="21" name="Text 17"/>
           <p:cNvSpPr txBox="1"/>
           <p:nvPr/>
         </p:nvSpPr>
         <p:spPr>
           <a:xfrm>
-            <a:off x="548640" y="4425696"/>
-            <a:ext cx="566928" cy="566928"/>
+            <a:off x="8040411" y="2606040"/>
+            <a:ext cx="548640" cy="548640"/>
           </a:xfrm>
           <a:prstGeom prst="rect">
             <a:avLst/>
@@ -16761,7 +17034,7 @@
               <a:buNone/>
             </a:pPr>
             <a:r>
-              <a:rPr lang="en-US" sz="1500" b="1" dirty="0">
+              <a:rPr lang="en-US" sz="1600" b="1" dirty="0">
                 <a:solidFill>
                   <a:schemeClr val="bg1"/>
                 </a:solidFill>
@@ -16771,20 +17044,20 @@
               </a:rPr>
               <a:t>4</a:t>
             </a:r>
-            <a:endParaRPr lang="en-US" sz="1500" dirty="0"/>
-          </a:p>
-        </p:txBody>
-      </p:sp>
-      <p:sp>
-        <p:nvSpPr>
-          <p:cNvPr id="16" name="Row text"/>
+            <a:endParaRPr lang="en-US" sz="1600" dirty="0"/>
+          </a:p>
+        </p:txBody>
+      </p:sp>
+      <p:sp>
+        <p:nvSpPr>
+          <p:cNvPr id="22" name="Flow head"/>
           <p:cNvSpPr txBox="1"/>
           <p:nvPr/>
         </p:nvSpPr>
         <p:spPr>
           <a:xfrm>
-            <a:off x="1325880" y="4379976"/>
-            <a:ext cx="10317175" cy="841248"/>
+            <a:off x="7278441" y="3291840"/>
+            <a:ext cx="2072579" cy="548640"/>
           </a:xfrm>
           <a:prstGeom prst="rect">
             <a:avLst/>
@@ -16793,34 +17066,73 @@
           <a:ln/>
         </p:spPr>
         <p:txBody>
-          <a:bodyPr wrap="square" lIns="0" tIns="0" rIns="0" bIns="0" rtlCol="0" anchor="ctr"/>
+          <a:bodyPr wrap="square" lIns="0" tIns="0" rIns="0" bIns="0" rtlCol="0" anchor="t"/>
           <a:lstStyle/>
           <a:p>
-            <a:pPr indent="0" marL="0">
+            <a:pPr algn="ctr" indent="0" marL="0">
               <a:buNone/>
             </a:pPr>
             <a:r>
-              <a:rPr lang="en-US" sz="1500" dirty="0">
+              <a:rPr lang="en-US" sz="1600" b="1" dirty="0">
                 <a:solidFill>
                   <a:schemeClr val="tx1"/>
                 </a:solidFill>
-              </a:rPr>
-              <a:t>The KKT conditions are both the audit protocol and the economics of the answer: only binding commitments carry prices, margins are equal at the best allocation, and a price bounds what relaxing its commitment can gain, with a range at a kink.</a:t>
-            </a:r>
-            <a:endParaRPr lang="en-US" sz="1500" dirty="0"/>
-          </a:p>
-        </p:txBody>
-      </p:sp>
-      <p:sp>
-        <p:nvSpPr>
-          <p:cNvPr id="17" name="Number"/>
+                <a:latin typeface="Cambria" pitchFamily="34" charset="0"/>
+                <a:ea typeface="Cambria" pitchFamily="34" charset="-122"/>
+                <a:cs typeface="Cambria" pitchFamily="34" charset="-120"/>
+              </a:rPr>
+              <a:t>Bound</a:t>
+            </a:r>
+            <a:endParaRPr lang="en-US" sz="1600" dirty="0"/>
+          </a:p>
+        </p:txBody>
+      </p:sp>
+      <p:sp>
+        <p:nvSpPr>
+          <p:cNvPr id="23" name="Flow text"/>
+          <p:cNvSpPr txBox="1"/>
+          <p:nvPr/>
+        </p:nvSpPr>
+        <p:spPr>
+          <a:xfrm>
+            <a:off x="7296729" y="3867912"/>
+            <a:ext cx="2036003" cy="1554480"/>
+          </a:xfrm>
+          <a:prstGeom prst="rect">
+            <a:avLst/>
+          </a:prstGeom>
+          <a:noFill/>
+          <a:ln/>
+        </p:spPr>
+        <p:txBody>
+          <a:bodyPr wrap="square" lIns="0" tIns="0" rIns="0" bIns="0" rtlCol="0" anchor="t"/>
+          <a:lstStyle/>
+          <a:p>
+            <a:pPr algn="ctr" indent="0" marL="0">
+              <a:buNone/>
+            </a:pPr>
+            <a:r>
+              <a:rPr lang="en-US" sz="1400" dirty="0">
+                <a:solidFill>
+                  <a:schemeClr val="tx2"/>
+                </a:solidFill>
+              </a:rPr>
+              <a:t>Compare the ceiling with the 64 lumpy plans; value the plan rounded down and rounded up.</a:t>
+            </a:r>
+            <a:endParaRPr lang="en-US" sz="1400" dirty="0"/>
+          </a:p>
+        </p:txBody>
+      </p:sp>
+      <p:sp>
+        <p:nvSpPr>
+          <p:cNvPr id="24" name="Number"/>
           <p:cNvSpPr/>
           <p:nvPr/>
         </p:nvSpPr>
         <p:spPr>
           <a:xfrm>
-            <a:off x="548640" y="5321808"/>
-            <a:ext cx="566928" cy="566928"/>
+            <a:off x="10259294" y="2606040"/>
+            <a:ext cx="548640" cy="548640"/>
           </a:xfrm>
           <a:prstGeom prst="ellipse">
             <a:avLst/>
@@ -16838,14 +17150,14 @@
       </p:sp>
       <p:sp>
         <p:nvSpPr>
-          <p:cNvPr id="18" name="Text 15"/>
+          <p:cNvPr id="25" name="Text 21"/>
           <p:cNvSpPr txBox="1"/>
           <p:nvPr/>
         </p:nvSpPr>
         <p:spPr>
           <a:xfrm>
-            <a:off x="548640" y="5321808"/>
-            <a:ext cx="566928" cy="566928"/>
+            <a:off x="10259294" y="2606040"/>
+            <a:ext cx="548640" cy="548640"/>
           </a:xfrm>
           <a:prstGeom prst="rect">
             <a:avLst/>
@@ -16861,7 +17173,7 @@
               <a:buNone/>
             </a:pPr>
             <a:r>
-              <a:rPr lang="en-US" sz="1500" b="1" dirty="0">
+              <a:rPr lang="en-US" sz="1600" b="1" dirty="0">
                 <a:solidFill>
                   <a:schemeClr val="bg1"/>
                 </a:solidFill>
@@ -16871,20 +17183,122 @@
               </a:rPr>
               <a:t>5</a:t>
             </a:r>
-            <a:endParaRPr lang="en-US" sz="1500" dirty="0"/>
-          </a:p>
-        </p:txBody>
-      </p:sp>
-      <p:sp>
-        <p:nvSpPr>
-          <p:cNvPr id="19" name="Row text"/>
+            <a:endParaRPr lang="en-US" sz="1600" dirty="0"/>
+          </a:p>
+        </p:txBody>
+      </p:sp>
+      <p:sp>
+        <p:nvSpPr>
+          <p:cNvPr id="26" name="Flow head"/>
           <p:cNvSpPr txBox="1"/>
           <p:nvPr/>
         </p:nvSpPr>
         <p:spPr>
           <a:xfrm>
-            <a:off x="1325880" y="5276088"/>
-            <a:ext cx="10317175" cy="841248"/>
+            <a:off x="9497324" y="3291840"/>
+            <a:ext cx="2072579" cy="548640"/>
+          </a:xfrm>
+          <a:prstGeom prst="rect">
+            <a:avLst/>
+          </a:prstGeom>
+          <a:noFill/>
+          <a:ln/>
+        </p:spPr>
+        <p:txBody>
+          <a:bodyPr wrap="square" lIns="0" tIns="0" rIns="0" bIns="0" rtlCol="0" anchor="t"/>
+          <a:lstStyle/>
+          <a:p>
+            <a:pPr algn="ctr" indent="0" marL="0">
+              <a:buNone/>
+            </a:pPr>
+            <a:r>
+              <a:rPr lang="en-US" sz="1600" b="1" dirty="0">
+                <a:solidFill>
+                  <a:schemeClr val="tx1"/>
+                </a:solidFill>
+                <a:latin typeface="Cambria" pitchFamily="34" charset="0"/>
+                <a:ea typeface="Cambria" pitchFamily="34" charset="-122"/>
+                <a:cs typeface="Cambria" pitchFamily="34" charset="-120"/>
+              </a:rPr>
+              <a:t>Stress the prices</a:t>
+            </a:r>
+            <a:endParaRPr lang="en-US" sz="1600" dirty="0"/>
+          </a:p>
+        </p:txBody>
+      </p:sp>
+      <p:sp>
+        <p:nvSpPr>
+          <p:cNvPr id="27" name="Flow text"/>
+          <p:cNvSpPr txBox="1"/>
+          <p:nvPr/>
+        </p:nvSpPr>
+        <p:spPr>
+          <a:xfrm>
+            <a:off x="9515612" y="3867912"/>
+            <a:ext cx="2036003" cy="1554480"/>
+          </a:xfrm>
+          <a:prstGeom prst="rect">
+            <a:avLst/>
+          </a:prstGeom>
+          <a:noFill/>
+          <a:ln/>
+        </p:spPr>
+        <p:txBody>
+          <a:bodyPr wrap="square" lIns="0" tIns="0" rIns="0" bIns="0" rtlCol="0" anchor="t"/>
+          <a:lstStyle/>
+          <a:p>
+            <a:pPr algn="ctr" indent="0" marL="0">
+              <a:buNone/>
+            </a:pPr>
+            <a:r>
+              <a:rPr lang="en-US" sz="1400" dirty="0">
+                <a:solidFill>
+                  <a:schemeClr val="tx2"/>
+                </a:solidFill>
+              </a:rPr>
+              <a:t>Move the credit from 0 to 60 years, add a capital cap, and find the kink at $360m.</a:t>
+            </a:r>
+            <a:endParaRPr lang="en-US" sz="1400" dirty="0"/>
+          </a:p>
+        </p:txBody>
+      </p:sp>
+      <p:sp>
+        <p:nvSpPr>
+          <p:cNvPr id="28" name="Deliverable card"/>
+          <p:cNvSpPr/>
+          <p:nvPr/>
+        </p:nvSpPr>
+        <p:spPr>
+          <a:xfrm>
+            <a:off x="548640" y="5486400"/>
+            <a:ext cx="11094415" cy="685800"/>
+          </a:xfrm>
+          <a:prstGeom prst="roundRect">
+            <a:avLst>
+              <a:gd name="adj" fmla="val 10667"/>
+            </a:avLst>
+          </a:prstGeom>
+          <a:solidFill>
+            <a:schemeClr val="bg2"/>
+          </a:solidFill>
+          <a:ln w="9525">
+            <a:solidFill>
+              <a:srgbClr val="C4CBD8"/>
+            </a:solidFill>
+            <a:prstDash val="solid"/>
+          </a:ln>
+        </p:spPr>
+      </p:sp>
+      <p:sp>
+        <p:nvSpPr>
+          <p:cNvPr id="29" name="Deliverable"/>
+          <p:cNvSpPr txBox="1"/>
+          <p:nvPr/>
+        </p:nvSpPr>
+        <p:spPr>
+          <a:xfrm>
+            <a:off x="777240" y="5559552"/>
+            <a:ext cx="10637215" cy="539496"/>
           </a:xfrm>
           <a:prstGeom prst="rect">
             <a:avLst/>
@@ -16900,14 +17314,22 @@
               <a:buNone/>
             </a:pPr>
             <a:r>
-              <a:rPr lang="en-US" sz="1500" dirty="0">
+              <a:rPr lang="en-US" sz="1400" b="1" dirty="0">
                 <a:solidFill>
                   <a:schemeClr val="tx1"/>
                 </a:solidFill>
               </a:rPr>
-              <a:t>Tiers, worst cases, ratio targets, and Gaussian chance commitments rewrite exactly into convex form; what cannot be rewritten is quarantined and relaxed, and the relaxation bounds every lumpy plan—Meridian's three-round plan lies within $7.1 million of anything achievable.</a:t>
-            </a:r>
-            <a:endParaRPr lang="en-US" sz="1500" dirty="0"/>
+              <a:t>Deliverable:</a:t>
+            </a:r>
+            <a:r>
+              <a:rPr lang="en-US" sz="1400" dirty="0">
+                <a:solidFill>
+                  <a:schemeClr val="tx1"/>
+                </a:solidFill>
+              </a:rPr>
+              <a:t> a one-page note to the board: the ceiling and the solver's certificate, the three-round plan's distance from it, the price list, the credits at which the relaxation proves the lumpy plan best, and whether further search is worth its cost. About 75 minutes.</a:t>
+            </a:r>
+            <a:endParaRPr lang="en-US" sz="1400" dirty="0"/>
           </a:p>
         </p:txBody>
       </p:sp>
@@ -17013,7 +17435,7 @@
                   <a:schemeClr val="accent1"/>
                 </a:solidFill>
               </a:rPr>
-              <a:t>THIS WEEK'S LABORATORY</a:t>
+              <a:t>KEY TAKEAWAYS</a:t>
             </a:r>
             <a:endParaRPr lang="en-US" sz="1200" dirty="0"/>
           </a:p>
@@ -17054,7 +17476,7 @@
                 <a:ea typeface="Cambria" pitchFamily="34" charset="-122"/>
                 <a:cs typeface="Cambria" pitchFamily="34" charset="-120"/>
               </a:rPr>
-              <a:t>Notebook and workbook reproduce the book</a:t>
+              <a:t>What to carry forward</a:t>
             </a:r>
             <a:endParaRPr lang="en-US" sz="3200" dirty="0"/>
           </a:p>
@@ -17062,26 +17484,24 @@
       </p:sp>
       <p:sp>
         <p:nvSpPr>
-          <p:cNvPr id="5" name="Stat card"/>
+          <p:cNvPr id="5" name="Number"/>
           <p:cNvSpPr/>
           <p:nvPr/>
         </p:nvSpPr>
         <p:spPr>
           <a:xfrm>
-            <a:off x="548640" y="1691640"/>
-            <a:ext cx="2567864" cy="1691640"/>
-          </a:xfrm>
-          <a:prstGeom prst="roundRect">
-            <a:avLst>
-              <a:gd name="adj" fmla="val 4324"/>
-            </a:avLst>
+            <a:off x="548640" y="1737360"/>
+            <a:ext cx="566928" cy="566928"/>
+          </a:xfrm>
+          <a:prstGeom prst="ellipse">
+            <a:avLst/>
           </a:prstGeom>
           <a:solidFill>
-            <a:schemeClr val="tx1"/>
+            <a:schemeClr val="accent1"/>
           </a:solidFill>
-          <a:ln w="9525">
+          <a:ln w="6350">
             <a:solidFill>
-              <a:srgbClr val="0F1E3D"/>
+              <a:schemeClr val="accent1"/>
             </a:solidFill>
             <a:prstDash val="solid"/>
           </a:ln>
@@ -17089,14 +17509,14 @@
       </p:sp>
       <p:sp>
         <p:nvSpPr>
-          <p:cNvPr id="6" name="Stat value"/>
+          <p:cNvPr id="6" name="Text 3"/>
           <p:cNvSpPr txBox="1"/>
           <p:nvPr/>
         </p:nvSpPr>
         <p:spPr>
           <a:xfrm>
-            <a:off x="685800" y="1801368"/>
-            <a:ext cx="2293544" cy="914400"/>
+            <a:off x="548640" y="1737360"/>
+            <a:ext cx="566928" cy="566928"/>
           </a:xfrm>
           <a:prstGeom prst="rect">
             <a:avLst/>
@@ -17112,30 +17532,30 @@
               <a:buNone/>
             </a:pPr>
             <a:r>
-              <a:rPr lang="en-US" sz="4400" b="1" dirty="0">
-                <a:solidFill>
-                  <a:schemeClr val="accent1"/>
-                </a:solidFill>
-                <a:latin typeface="Cambria" pitchFamily="34" charset="0"/>
-                <a:ea typeface="Cambria" pitchFamily="34" charset="-122"/>
-                <a:cs typeface="Cambria" pitchFamily="34" charset="-120"/>
-              </a:rPr>
-              <a:t>91</a:t>
-            </a:r>
-            <a:endParaRPr lang="en-US" sz="4400" dirty="0"/>
-          </a:p>
-        </p:txBody>
-      </p:sp>
-      <p:sp>
-        <p:nvSpPr>
-          <p:cNvPr id="7" name="Stat label"/>
+              <a:rPr lang="en-US" sz="1500" b="1" dirty="0">
+                <a:solidFill>
+                  <a:schemeClr val="bg1"/>
+                </a:solidFill>
+                <a:latin typeface="Calibri" pitchFamily="34" charset="0"/>
+                <a:ea typeface="Calibri" pitchFamily="34" charset="-122"/>
+                <a:cs typeface="Calibri" pitchFamily="34" charset="-120"/>
+              </a:rPr>
+              <a:t>1</a:t>
+            </a:r>
+            <a:endParaRPr lang="en-US" sz="1500" dirty="0"/>
+          </a:p>
+        </p:txBody>
+      </p:sp>
+      <p:sp>
+        <p:nvSpPr>
+          <p:cNvPr id="7" name="Row text"/>
           <p:cNvSpPr txBox="1"/>
           <p:nvPr/>
         </p:nvSpPr>
         <p:spPr>
           <a:xfrm>
-            <a:off x="685800" y="2697480"/>
-            <a:ext cx="2293544" cy="612648"/>
+            <a:off x="1325880" y="1691640"/>
+            <a:ext cx="10317175" cy="841248"/>
           </a:xfrm>
           <a:prstGeom prst="rect">
             <a:avLst/>
@@ -17144,46 +17564,144 @@
           <a:ln/>
         </p:spPr>
         <p:txBody>
-          <a:bodyPr wrap="square" lIns="0" tIns="0" rIns="0" bIns="0" rtlCol="0" anchor="t"/>
+          <a:bodyPr wrap="square" lIns="0" tIns="0" rIns="0" bIns="0" rtlCol="0" anchor="ctr"/>
+          <a:lstStyle/>
+          <a:p>
+            <a:pPr indent="0" marL="0">
+              <a:buNone/>
+            </a:pPr>
+            <a:r>
+              <a:rPr lang="en-US" sz="1500" dirty="0">
+                <a:solidFill>
+                  <a:schemeClr val="tx1"/>
+                </a:solidFill>
+              </a:rPr>
+              <a:t>Convexity turns optimization into proof: in a convex instance local answers are global, best plans form a menu, and curvature makes the best plan unique and near-best plans near.</a:t>
+            </a:r>
+            <a:endParaRPr lang="en-US" sz="1500" dirty="0"/>
+          </a:p>
+        </p:txBody>
+      </p:sp>
+      <p:sp>
+        <p:nvSpPr>
+          <p:cNvPr id="8" name="Number"/>
+          <p:cNvSpPr/>
+          <p:nvPr/>
+        </p:nvSpPr>
+        <p:spPr>
+          <a:xfrm>
+            <a:off x="548640" y="2633472"/>
+            <a:ext cx="566928" cy="566928"/>
+          </a:xfrm>
+          <a:prstGeom prst="ellipse">
+            <a:avLst/>
+          </a:prstGeom>
+          <a:solidFill>
+            <a:schemeClr val="accent1"/>
+          </a:solidFill>
+          <a:ln w="6350">
+            <a:solidFill>
+              <a:schemeClr val="accent1"/>
+            </a:solidFill>
+            <a:prstDash val="solid"/>
+          </a:ln>
+        </p:spPr>
+      </p:sp>
+      <p:sp>
+        <p:nvSpPr>
+          <p:cNvPr id="9" name="Text 6"/>
+          <p:cNvSpPr txBox="1"/>
+          <p:nvPr/>
+        </p:nvSpPr>
+        <p:spPr>
+          <a:xfrm>
+            <a:off x="548640" y="2633472"/>
+            <a:ext cx="566928" cy="566928"/>
+          </a:xfrm>
+          <a:prstGeom prst="rect">
+            <a:avLst/>
+          </a:prstGeom>
+          <a:noFill/>
+          <a:ln/>
+        </p:spPr>
+        <p:txBody>
+          <a:bodyPr wrap="square" lIns="0" tIns="0" rIns="0" bIns="0" rtlCol="0" anchor="ctr"/>
           <a:lstStyle/>
           <a:p>
             <a:pPr algn="ctr" indent="0" marL="0">
               <a:buNone/>
             </a:pPr>
             <a:r>
-              <a:rPr lang="en-US" sz="1400" dirty="0">
-                <a:solidFill>
-                  <a:schemeClr val="bg2"/>
-                </a:solidFill>
-              </a:rPr>
-              <a:t>notebook checkpoints, every one PASS</a:t>
-            </a:r>
-            <a:endParaRPr lang="en-US" sz="1400" dirty="0"/>
-          </a:p>
-        </p:txBody>
-      </p:sp>
-      <p:sp>
-        <p:nvSpPr>
-          <p:cNvPr id="8" name="Stat card"/>
+              <a:rPr lang="en-US" sz="1500" b="1" dirty="0">
+                <a:solidFill>
+                  <a:schemeClr val="bg1"/>
+                </a:solidFill>
+                <a:latin typeface="Calibri" pitchFamily="34" charset="0"/>
+                <a:ea typeface="Calibri" pitchFamily="34" charset="-122"/>
+                <a:cs typeface="Calibri" pitchFamily="34" charset="-120"/>
+              </a:rPr>
+              <a:t>2</a:t>
+            </a:r>
+            <a:endParaRPr lang="en-US" sz="1500" dirty="0"/>
+          </a:p>
+        </p:txBody>
+      </p:sp>
+      <p:sp>
+        <p:nvSpPr>
+          <p:cNvPr id="10" name="Row text"/>
+          <p:cNvSpPr txBox="1"/>
+          <p:nvPr/>
+        </p:nvSpPr>
+        <p:spPr>
+          <a:xfrm>
+            <a:off x="1325880" y="2587752"/>
+            <a:ext cx="10317175" cy="841248"/>
+          </a:xfrm>
+          <a:prstGeom prst="rect">
+            <a:avLst/>
+          </a:prstGeom>
+          <a:noFill/>
+          <a:ln/>
+        </p:spPr>
+        <p:txBody>
+          <a:bodyPr wrap="square" lIns="0" tIns="0" rIns="0" bIns="0" rtlCol="0" anchor="ctr"/>
+          <a:lstStyle/>
+          <a:p>
+            <a:pPr indent="0" marL="0">
+              <a:buNone/>
+            </a:pPr>
+            <a:r>
+              <a:rPr lang="en-US" sz="1500" dirty="0">
+                <a:solidFill>
+                  <a:schemeClr val="tx1"/>
+                </a:solidFill>
+              </a:rPr>
+              <a:t>Convexity is recognized block by block from a catalog of shapes and rules; it breaks at set-up charges, all-or-nothing choices, products of decisions, and commitments that hold a concave quantity below a ceiling.</a:t>
+            </a:r>
+            <a:endParaRPr lang="en-US" sz="1500" dirty="0"/>
+          </a:p>
+        </p:txBody>
+      </p:sp>
+      <p:sp>
+        <p:nvSpPr>
+          <p:cNvPr id="11" name="Number"/>
           <p:cNvSpPr/>
           <p:nvPr/>
         </p:nvSpPr>
         <p:spPr>
           <a:xfrm>
-            <a:off x="3390824" y="1691640"/>
-            <a:ext cx="2567864" cy="1691640"/>
-          </a:xfrm>
-          <a:prstGeom prst="roundRect">
-            <a:avLst>
-              <a:gd name="adj" fmla="val 4324"/>
-            </a:avLst>
+            <a:off x="548640" y="3529584"/>
+            <a:ext cx="566928" cy="566928"/>
+          </a:xfrm>
+          <a:prstGeom prst="ellipse">
+            <a:avLst/>
           </a:prstGeom>
           <a:solidFill>
-            <a:schemeClr val="bg2"/>
+            <a:schemeClr val="accent1"/>
           </a:solidFill>
-          <a:ln w="9525">
+          <a:ln w="6350">
             <a:solidFill>
-              <a:srgbClr val="C4CBD8"/>
+              <a:schemeClr val="accent1"/>
             </a:solidFill>
             <a:prstDash val="solid"/>
           </a:ln>
@@ -17191,14 +17709,14 @@
       </p:sp>
       <p:sp>
         <p:nvSpPr>
-          <p:cNvPr id="9" name="Stat value"/>
+          <p:cNvPr id="12" name="Text 9"/>
           <p:cNvSpPr txBox="1"/>
           <p:nvPr/>
         </p:nvSpPr>
         <p:spPr>
           <a:xfrm>
-            <a:off x="3527984" y="1801368"/>
-            <a:ext cx="2293544" cy="914400"/>
+            <a:off x="548640" y="3529584"/>
+            <a:ext cx="566928" cy="566928"/>
           </a:xfrm>
           <a:prstGeom prst="rect">
             <a:avLst/>
@@ -17214,30 +17732,30 @@
               <a:buNone/>
             </a:pPr>
             <a:r>
-              <a:rPr lang="en-US" sz="4400" b="1" dirty="0">
-                <a:solidFill>
-                  <a:schemeClr val="tx1"/>
-                </a:solidFill>
-                <a:latin typeface="Cambria" pitchFamily="34" charset="0"/>
-                <a:ea typeface="Cambria" pitchFamily="34" charset="-122"/>
-                <a:cs typeface="Cambria" pitchFamily="34" charset="-120"/>
-              </a:rPr>
-              <a:t>101</a:t>
-            </a:r>
-            <a:endParaRPr lang="en-US" sz="4400" dirty="0"/>
-          </a:p>
-        </p:txBody>
-      </p:sp>
-      <p:sp>
-        <p:nvSpPr>
-          <p:cNvPr id="10" name="Stat label"/>
+              <a:rPr lang="en-US" sz="1500" b="1" dirty="0">
+                <a:solidFill>
+                  <a:schemeClr val="bg1"/>
+                </a:solidFill>
+                <a:latin typeface="Calibri" pitchFamily="34" charset="0"/>
+                <a:ea typeface="Calibri" pitchFamily="34" charset="-122"/>
+                <a:cs typeface="Calibri" pitchFamily="34" charset="-120"/>
+              </a:rPr>
+              <a:t>3</a:t>
+            </a:r>
+            <a:endParaRPr lang="en-US" sz="1500" dirty="0"/>
+          </a:p>
+        </p:txBody>
+      </p:sp>
+      <p:sp>
+        <p:nvSpPr>
+          <p:cNvPr id="13" name="Row text"/>
           <p:cNvSpPr txBox="1"/>
           <p:nvPr/>
         </p:nvSpPr>
         <p:spPr>
           <a:xfrm>
-            <a:off x="3527984" y="2697480"/>
-            <a:ext cx="2293544" cy="612648"/>
+            <a:off x="1325880" y="3483864"/>
+            <a:ext cx="10317175" cy="841248"/>
           </a:xfrm>
           <a:prstGeom prst="rect">
             <a:avLst/>
@@ -17246,46 +17764,144 @@
           <a:ln/>
         </p:spPr>
         <p:txBody>
-          <a:bodyPr wrap="square" lIns="0" tIns="0" rIns="0" bIns="0" rtlCol="0" anchor="t"/>
+          <a:bodyPr wrap="square" lIns="0" tIns="0" rIns="0" bIns="0" rtlCol="0" anchor="ctr"/>
+          <a:lstStyle/>
+          <a:p>
+            <a:pPr indent="0" marL="0">
+              <a:buNone/>
+            </a:pPr>
+            <a:r>
+              <a:rPr lang="en-US" sz="1500" dirty="0">
+                <a:solidFill>
+                  <a:schemeClr val="tx1"/>
+                </a:solidFill>
+              </a:rPr>
+              <a:t>Duality turns commitments into prices: any price list gives a ceiling on value, and under Slater's condition the best price list closes the gap, so a plan and its prices certify each other.</a:t>
+            </a:r>
+            <a:endParaRPr lang="en-US" sz="1500" dirty="0"/>
+          </a:p>
+        </p:txBody>
+      </p:sp>
+      <p:sp>
+        <p:nvSpPr>
+          <p:cNvPr id="14" name="Number"/>
+          <p:cNvSpPr/>
+          <p:nvPr/>
+        </p:nvSpPr>
+        <p:spPr>
+          <a:xfrm>
+            <a:off x="548640" y="4425696"/>
+            <a:ext cx="566928" cy="566928"/>
+          </a:xfrm>
+          <a:prstGeom prst="ellipse">
+            <a:avLst/>
+          </a:prstGeom>
+          <a:solidFill>
+            <a:schemeClr val="accent1"/>
+          </a:solidFill>
+          <a:ln w="6350">
+            <a:solidFill>
+              <a:schemeClr val="accent1"/>
+            </a:solidFill>
+            <a:prstDash val="solid"/>
+          </a:ln>
+        </p:spPr>
+      </p:sp>
+      <p:sp>
+        <p:nvSpPr>
+          <p:cNvPr id="15" name="Text 12"/>
+          <p:cNvSpPr txBox="1"/>
+          <p:nvPr/>
+        </p:nvSpPr>
+        <p:spPr>
+          <a:xfrm>
+            <a:off x="548640" y="4425696"/>
+            <a:ext cx="566928" cy="566928"/>
+          </a:xfrm>
+          <a:prstGeom prst="rect">
+            <a:avLst/>
+          </a:prstGeom>
+          <a:noFill/>
+          <a:ln/>
+        </p:spPr>
+        <p:txBody>
+          <a:bodyPr wrap="square" lIns="0" tIns="0" rIns="0" bIns="0" rtlCol="0" anchor="ctr"/>
           <a:lstStyle/>
           <a:p>
             <a:pPr algn="ctr" indent="0" marL="0">
               <a:buNone/>
             </a:pPr>
             <a:r>
-              <a:rPr lang="en-US" sz="1400" dirty="0">
-                <a:solidFill>
-                  <a:schemeClr val="tx2"/>
-                </a:solidFill>
-              </a:rPr>
-              <a:t>workbook checks against the engine, ALL PASS</a:t>
-            </a:r>
-            <a:endParaRPr lang="en-US" sz="1400" dirty="0"/>
-          </a:p>
-        </p:txBody>
-      </p:sp>
-      <p:sp>
-        <p:nvSpPr>
-          <p:cNvPr id="11" name="Stat card"/>
+              <a:rPr lang="en-US" sz="1500" b="1" dirty="0">
+                <a:solidFill>
+                  <a:schemeClr val="bg1"/>
+                </a:solidFill>
+                <a:latin typeface="Calibri" pitchFamily="34" charset="0"/>
+                <a:ea typeface="Calibri" pitchFamily="34" charset="-122"/>
+                <a:cs typeface="Calibri" pitchFamily="34" charset="-120"/>
+              </a:rPr>
+              <a:t>4</a:t>
+            </a:r>
+            <a:endParaRPr lang="en-US" sz="1500" dirty="0"/>
+          </a:p>
+        </p:txBody>
+      </p:sp>
+      <p:sp>
+        <p:nvSpPr>
+          <p:cNvPr id="16" name="Row text"/>
+          <p:cNvSpPr txBox="1"/>
+          <p:nvPr/>
+        </p:nvSpPr>
+        <p:spPr>
+          <a:xfrm>
+            <a:off x="1325880" y="4379976"/>
+            <a:ext cx="10317175" cy="841248"/>
+          </a:xfrm>
+          <a:prstGeom prst="rect">
+            <a:avLst/>
+          </a:prstGeom>
+          <a:noFill/>
+          <a:ln/>
+        </p:spPr>
+        <p:txBody>
+          <a:bodyPr wrap="square" lIns="0" tIns="0" rIns="0" bIns="0" rtlCol="0" anchor="ctr"/>
+          <a:lstStyle/>
+          <a:p>
+            <a:pPr indent="0" marL="0">
+              <a:buNone/>
+            </a:pPr>
+            <a:r>
+              <a:rPr lang="en-US" sz="1500" dirty="0">
+                <a:solidFill>
+                  <a:schemeClr val="tx1"/>
+                </a:solidFill>
+              </a:rPr>
+              <a:t>The KKT conditions are both the audit protocol and the economics of the answer: only binding commitments carry prices, margins are equal at the best allocation, and a price bounds what relaxing its commitment can gain, with a range at a kink.</a:t>
+            </a:r>
+            <a:endParaRPr lang="en-US" sz="1500" dirty="0"/>
+          </a:p>
+        </p:txBody>
+      </p:sp>
+      <p:sp>
+        <p:nvSpPr>
+          <p:cNvPr id="17" name="Number"/>
           <p:cNvSpPr/>
           <p:nvPr/>
         </p:nvSpPr>
         <p:spPr>
           <a:xfrm>
-            <a:off x="6233008" y="1691640"/>
-            <a:ext cx="2567864" cy="1691640"/>
-          </a:xfrm>
-          <a:prstGeom prst="roundRect">
-            <a:avLst>
-              <a:gd name="adj" fmla="val 4324"/>
-            </a:avLst>
+            <a:off x="548640" y="5321808"/>
+            <a:ext cx="566928" cy="566928"/>
+          </a:xfrm>
+          <a:prstGeom prst="ellipse">
+            <a:avLst/>
           </a:prstGeom>
           <a:solidFill>
-            <a:schemeClr val="bg2"/>
+            <a:schemeClr val="accent1"/>
           </a:solidFill>
-          <a:ln w="9525">
+          <a:ln w="6350">
             <a:solidFill>
-              <a:srgbClr val="C4CBD8"/>
+              <a:schemeClr val="accent1"/>
             </a:solidFill>
             <a:prstDash val="solid"/>
           </a:ln>
@@ -17293,14 +17909,14 @@
       </p:sp>
       <p:sp>
         <p:nvSpPr>
-          <p:cNvPr id="12" name="Stat value"/>
+          <p:cNvPr id="18" name="Text 15"/>
           <p:cNvSpPr txBox="1"/>
           <p:nvPr/>
         </p:nvSpPr>
         <p:spPr>
           <a:xfrm>
-            <a:off x="6370168" y="1801368"/>
-            <a:ext cx="2293544" cy="914400"/>
+            <a:off x="548640" y="5321808"/>
+            <a:ext cx="566928" cy="566928"/>
           </a:xfrm>
           <a:prstGeom prst="rect">
             <a:avLst/>
@@ -17316,30 +17932,30 @@
               <a:buNone/>
             </a:pPr>
             <a:r>
-              <a:rPr lang="en-US" sz="4400" b="1" dirty="0">
-                <a:solidFill>
-                  <a:schemeClr val="tx1"/>
-                </a:solidFill>
-                <a:latin typeface="Cambria" pitchFamily="34" charset="0"/>
-                <a:ea typeface="Cambria" pitchFamily="34" charset="-122"/>
-                <a:cs typeface="Cambria" pitchFamily="34" charset="-120"/>
-              </a:rPr>
-              <a:t>26203</a:t>
-            </a:r>
-            <a:endParaRPr lang="en-US" sz="4400" dirty="0"/>
-          </a:p>
-        </p:txBody>
-      </p:sp>
-      <p:sp>
-        <p:nvSpPr>
-          <p:cNvPr id="13" name="Stat label"/>
+              <a:rPr lang="en-US" sz="1500" b="1" dirty="0">
+                <a:solidFill>
+                  <a:schemeClr val="bg1"/>
+                </a:solidFill>
+                <a:latin typeface="Calibri" pitchFamily="34" charset="0"/>
+                <a:ea typeface="Calibri" pitchFamily="34" charset="-122"/>
+                <a:cs typeface="Calibri" pitchFamily="34" charset="-120"/>
+              </a:rPr>
+              <a:t>5</a:t>
+            </a:r>
+            <a:endParaRPr lang="en-US" sz="1500" dirty="0"/>
+          </a:p>
+        </p:txBody>
+      </p:sp>
+      <p:sp>
+        <p:nvSpPr>
+          <p:cNvPr id="19" name="Row text"/>
           <p:cNvSpPr txBox="1"/>
           <p:nvPr/>
         </p:nvSpPr>
         <p:spPr>
           <a:xfrm>
-            <a:off x="6370168" y="2697480"/>
-            <a:ext cx="2293544" cy="612648"/>
+            <a:off x="1325880" y="5276088"/>
+            <a:ext cx="10317175" cy="841248"/>
           </a:xfrm>
           <a:prstGeom prst="rect">
             <a:avLst/>
@@ -17348,215 +17964,21 @@
           <a:ln/>
         </p:spPr>
         <p:txBody>
-          <a:bodyPr wrap="square" lIns="0" tIns="0" rIns="0" bIns="0" rtlCol="0" anchor="t"/>
+          <a:bodyPr wrap="square" lIns="0" tIns="0" rIns="0" bIns="0" rtlCol="0" anchor="ctr"/>
           <a:lstStyle/>
           <a:p>
-            <a:pPr algn="ctr" indent="0" marL="0">
+            <a:pPr indent="0" marL="0">
               <a:buNone/>
             </a:pPr>
             <a:r>
-              <a:rPr lang="en-US" sz="1400" dirty="0">
-                <a:solidFill>
-                  <a:schemeClr val="tx2"/>
-                </a:solidFill>
-              </a:rPr>
-              <a:t>the lab's seed</a:t>
-            </a:r>
-            <a:endParaRPr lang="en-US" sz="1400" dirty="0"/>
-          </a:p>
-        </p:txBody>
-      </p:sp>
-      <p:sp>
-        <p:nvSpPr>
-          <p:cNvPr id="14" name="Stat card"/>
-          <p:cNvSpPr/>
-          <p:nvPr/>
-        </p:nvSpPr>
-        <p:spPr>
-          <a:xfrm>
-            <a:off x="9075191" y="1691640"/>
-            <a:ext cx="2567864" cy="1691640"/>
-          </a:xfrm>
-          <a:prstGeom prst="roundRect">
-            <a:avLst>
-              <a:gd name="adj" fmla="val 4324"/>
-            </a:avLst>
-          </a:prstGeom>
-          <a:solidFill>
-            <a:schemeClr val="bg2"/>
-          </a:solidFill>
-          <a:ln w="9525">
-            <a:solidFill>
-              <a:srgbClr val="C4CBD8"/>
-            </a:solidFill>
-            <a:prstDash val="solid"/>
-          </a:ln>
-        </p:spPr>
-      </p:sp>
-      <p:sp>
-        <p:nvSpPr>
-          <p:cNvPr id="15" name="Stat value"/>
-          <p:cNvSpPr txBox="1"/>
-          <p:nvPr/>
-        </p:nvSpPr>
-        <p:spPr>
-          <a:xfrm>
-            <a:off x="9212351" y="1801368"/>
-            <a:ext cx="2293544" cy="914400"/>
-          </a:xfrm>
-          <a:prstGeom prst="rect">
-            <a:avLst/>
-          </a:prstGeom>
-          <a:noFill/>
-          <a:ln/>
-        </p:spPr>
-        <p:txBody>
-          <a:bodyPr wrap="square" lIns="0" tIns="0" rIns="0" bIns="0" rtlCol="0" anchor="ctr"/>
-          <a:lstStyle/>
-          <a:p>
-            <a:pPr algn="ctr" indent="0" marL="0">
-              <a:buNone/>
-            </a:pPr>
-            <a:r>
-              <a:rPr lang="en-US" sz="3000" b="1" dirty="0">
+              <a:rPr lang="en-US" sz="1500" dirty="0">
                 <a:solidFill>
                   <a:schemeClr val="tx1"/>
                 </a:solidFill>
-                <a:latin typeface="Cambria" pitchFamily="34" charset="0"/>
-                <a:ea typeface="Cambria" pitchFamily="34" charset="-122"/>
-                <a:cs typeface="Cambria" pitchFamily="34" charset="-120"/>
-              </a:rPr>
-              <a:t>AXIOM-03</a:t>
-            </a:r>
-            <a:endParaRPr lang="en-US" sz="3000" dirty="0"/>
-          </a:p>
-        </p:txBody>
-      </p:sp>
-      <p:sp>
-        <p:nvSpPr>
-          <p:cNvPr id="16" name="Stat label"/>
-          <p:cNvSpPr txBox="1"/>
-          <p:nvPr/>
-        </p:nvSpPr>
-        <p:spPr>
-          <a:xfrm>
-            <a:off x="9212351" y="2697480"/>
-            <a:ext cx="2293544" cy="612648"/>
-          </a:xfrm>
-          <a:prstGeom prst="rect">
-            <a:avLst/>
-          </a:prstGeom>
-          <a:noFill/>
-          <a:ln/>
-        </p:spPr>
-        <p:txBody>
-          <a:bodyPr wrap="square" lIns="0" tIns="0" rIns="0" bIns="0" rtlCol="0" anchor="t"/>
-          <a:lstStyle/>
-          <a:p>
-            <a:pPr algn="ctr" indent="0" marL="0">
-              <a:buNone/>
-            </a:pPr>
-            <a:r>
-              <a:rPr lang="en-US" sz="1400" dirty="0">
-                <a:solidFill>
-                  <a:schemeClr val="tx2"/>
-                </a:solidFill>
-              </a:rPr>
-              <a:t>AXIOM Lab 2.3</a:t>
-            </a:r>
-            <a:endParaRPr lang="en-US" sz="1400" dirty="0"/>
-          </a:p>
-        </p:txBody>
-      </p:sp>
-      <p:sp>
-        <p:nvSpPr>
-          <p:cNvPr id="17" name="Bullets"/>
-          <p:cNvSpPr txBox="1"/>
-          <p:nvPr/>
-        </p:nvSpPr>
-        <p:spPr>
-          <a:xfrm>
-            <a:off x="548640" y="3703320"/>
-            <a:ext cx="11094415" cy="2468880"/>
-          </a:xfrm>
-          <a:prstGeom prst="rect">
-            <a:avLst/>
-          </a:prstGeom>
-          <a:noFill/>
-          <a:ln/>
-        </p:spPr>
-        <p:txBody>
-          <a:bodyPr wrap="square" lIns="635" tIns="635" rIns="635" bIns="635" rtlCol="0" anchor="t"/>
-          <a:lstStyle/>
-          <a:p>
-            <a:pPr marL="228600" indent="-228600">
-              <a:spcAft>
-                <a:spcPts val="800"/>
-              </a:spcAft>
-              <a:buSzPct val="100000"/>
-              <a:buChar char="•"/>
-            </a:pPr>
-            <a:r>
-              <a:rPr lang="en-US" sz="1700" b="1" dirty="0">
-                <a:solidFill>
-                  <a:schemeClr val="tx1"/>
-                </a:solidFill>
-              </a:rPr>
-              <a:t>Notebook</a:t>
-            </a:r>
-            <a:r>
-              <a:rPr lang="en-US" sz="1700" dirty="0">
-                <a:solidFill>
-                  <a:schemeClr val="tx1"/>
-                </a:solidFill>
-              </a:rPr>
-              <a:t> DCT_V2_Ch03_Lab.ipynb: Worked Example 3.1 and the lab's five steps in seven panels, with an interior-point method written out in numpy, ready for Colab</a:t>
-            </a:r>
-            <a:endParaRPr lang="en-US" sz="1700" dirty="0"/>
-          </a:p>
-          <a:p>
-            <a:pPr marL="228600" indent="-228600">
-              <a:spcAft>
-                <a:spcPts val="800"/>
-              </a:spcAft>
-              <a:buSzPct val="100000"/>
-              <a:buChar char="•"/>
-            </a:pPr>
-            <a:r>
-              <a:rPr lang="en-US" sz="1700" b="1" dirty="0">
-                <a:solidFill>
-                  <a:schemeClr val="tx1"/>
-                </a:solidFill>
-              </a:rPr>
-              <a:t>Workbook</a:t>
-            </a:r>
-            <a:r>
-              <a:rPr lang="en-US" sz="1700" dirty="0">
-                <a:solidFill>
-                  <a:schemeClr val="tx1"/>
-                </a:solidFill>
-              </a:rPr>
-              <a:t> DCT_V2_Ch03_Lab.xlsx: the 64 lumpy plans, the closed form with its prices and KKT residuals, Table 3.5 and the capital cap, in formulas</a:t>
-            </a:r>
-            <a:endParaRPr lang="en-US" sz="1700" dirty="0"/>
-          </a:p>
-          <a:p>
-            <a:pPr marL="228600" indent="-228600">
-              <a:spcAft>
-                <a:spcPts val="800"/>
-              </a:spcAft>
-              <a:buSzPct val="100000"/>
-              <a:buChar char="•"/>
-            </a:pPr>
-            <a:r>
-              <a:rPr lang="en-US" sz="1700" dirty="0">
-                <a:solidFill>
-                  <a:schemeClr val="tx1"/>
-                </a:solidFill>
-              </a:rPr>
-              <a:t>Every number on these slides is the book's, and both companions check it</a:t>
-            </a:r>
-            <a:endParaRPr lang="en-US" sz="1700" dirty="0"/>
+              </a:rPr>
+              <a:t>Tiers, worst cases, ratio targets, and Gaussian chance commitments rewrite exactly into convex form; what cannot be rewritten is quarantined and relaxed, and the relaxation bounds every lumpy plan—Meridian's three-round plan lies within $7.1 million of anything achievable.</a:t>
+            </a:r>
+            <a:endParaRPr lang="en-US" sz="1500" dirty="0"/>
           </a:p>
         </p:txBody>
       </p:sp>
@@ -17662,6 +18084,655 @@
                   <a:schemeClr val="accent1"/>
                 </a:solidFill>
               </a:rPr>
+              <a:t>THIS WEEK'S LABORATORY</a:t>
+            </a:r>
+            <a:endParaRPr lang="en-US" sz="1200" dirty="0"/>
+          </a:p>
+        </p:txBody>
+      </p:sp>
+      <p:sp>
+        <p:nvSpPr>
+          <p:cNvPr id="4" name="Text 1"/>
+          <p:cNvSpPr/>
+          <p:nvPr>
+            <p:ph idx="103" type="title" hasCustomPrompt="1"/>
+          </p:nvPr>
+        </p:nvSpPr>
+        <p:spPr>
+          <a:xfrm>
+            <a:off x="548640" y="658368"/>
+            <a:ext cx="11094415" cy="868680"/>
+          </a:xfrm>
+          <a:prstGeom prst="rect">
+            <a:avLst/>
+          </a:prstGeom>
+          <a:noFill/>
+          <a:ln/>
+        </p:spPr>
+        <p:txBody>
+          <a:bodyPr wrap="square" lIns="0" tIns="0" rIns="0" bIns="0" rtlCol="0" anchor="t"/>
+          <a:lstStyle/>
+          <a:p>
+            <a:pPr algn="l" indent="0" marL="0">
+              <a:buNone/>
+            </a:pPr>
+            <a:r>
+              <a:rPr lang="en-US" sz="3200" b="1" dirty="0">
+                <a:solidFill>
+                  <a:schemeClr val="tx1"/>
+                </a:solidFill>
+                <a:latin typeface="Cambria" pitchFamily="34" charset="0"/>
+                <a:ea typeface="Cambria" pitchFamily="34" charset="-122"/>
+                <a:cs typeface="Cambria" pitchFamily="34" charset="-120"/>
+              </a:rPr>
+              <a:t>Notebook and workbook reproduce the book</a:t>
+            </a:r>
+            <a:endParaRPr lang="en-US" sz="3200" dirty="0"/>
+          </a:p>
+        </p:txBody>
+      </p:sp>
+      <p:sp>
+        <p:nvSpPr>
+          <p:cNvPr id="5" name="Stat card"/>
+          <p:cNvSpPr/>
+          <p:nvPr/>
+        </p:nvSpPr>
+        <p:spPr>
+          <a:xfrm>
+            <a:off x="548640" y="1691640"/>
+            <a:ext cx="2567864" cy="1691640"/>
+          </a:xfrm>
+          <a:prstGeom prst="roundRect">
+            <a:avLst>
+              <a:gd name="adj" fmla="val 4324"/>
+            </a:avLst>
+          </a:prstGeom>
+          <a:solidFill>
+            <a:schemeClr val="tx1"/>
+          </a:solidFill>
+          <a:ln w="9525">
+            <a:solidFill>
+              <a:srgbClr val="0F1E3D"/>
+            </a:solidFill>
+            <a:prstDash val="solid"/>
+          </a:ln>
+        </p:spPr>
+      </p:sp>
+      <p:sp>
+        <p:nvSpPr>
+          <p:cNvPr id="6" name="Stat value"/>
+          <p:cNvSpPr txBox="1"/>
+          <p:nvPr/>
+        </p:nvSpPr>
+        <p:spPr>
+          <a:xfrm>
+            <a:off x="685800" y="1801368"/>
+            <a:ext cx="2293544" cy="914400"/>
+          </a:xfrm>
+          <a:prstGeom prst="rect">
+            <a:avLst/>
+          </a:prstGeom>
+          <a:noFill/>
+          <a:ln/>
+        </p:spPr>
+        <p:txBody>
+          <a:bodyPr wrap="square" lIns="0" tIns="0" rIns="0" bIns="0" rtlCol="0" anchor="ctr"/>
+          <a:lstStyle/>
+          <a:p>
+            <a:pPr algn="ctr" indent="0" marL="0">
+              <a:buNone/>
+            </a:pPr>
+            <a:r>
+              <a:rPr lang="en-US" sz="4400" b="1" dirty="0">
+                <a:solidFill>
+                  <a:schemeClr val="accent1"/>
+                </a:solidFill>
+                <a:latin typeface="Cambria" pitchFamily="34" charset="0"/>
+                <a:ea typeface="Cambria" pitchFamily="34" charset="-122"/>
+                <a:cs typeface="Cambria" pitchFamily="34" charset="-120"/>
+              </a:rPr>
+              <a:t>91</a:t>
+            </a:r>
+            <a:endParaRPr lang="en-US" sz="4400" dirty="0"/>
+          </a:p>
+        </p:txBody>
+      </p:sp>
+      <p:sp>
+        <p:nvSpPr>
+          <p:cNvPr id="7" name="Stat label"/>
+          <p:cNvSpPr txBox="1"/>
+          <p:nvPr/>
+        </p:nvSpPr>
+        <p:spPr>
+          <a:xfrm>
+            <a:off x="685800" y="2697480"/>
+            <a:ext cx="2293544" cy="612648"/>
+          </a:xfrm>
+          <a:prstGeom prst="rect">
+            <a:avLst/>
+          </a:prstGeom>
+          <a:noFill/>
+          <a:ln/>
+        </p:spPr>
+        <p:txBody>
+          <a:bodyPr wrap="square" lIns="0" tIns="0" rIns="0" bIns="0" rtlCol="0" anchor="t"/>
+          <a:lstStyle/>
+          <a:p>
+            <a:pPr algn="ctr" indent="0" marL="0">
+              <a:buNone/>
+            </a:pPr>
+            <a:r>
+              <a:rPr lang="en-US" sz="1400" dirty="0">
+                <a:solidFill>
+                  <a:schemeClr val="bg2"/>
+                </a:solidFill>
+              </a:rPr>
+              <a:t>notebook checkpoints, every one PASS</a:t>
+            </a:r>
+            <a:endParaRPr lang="en-US" sz="1400" dirty="0"/>
+          </a:p>
+        </p:txBody>
+      </p:sp>
+      <p:sp>
+        <p:nvSpPr>
+          <p:cNvPr id="8" name="Stat card"/>
+          <p:cNvSpPr/>
+          <p:nvPr/>
+        </p:nvSpPr>
+        <p:spPr>
+          <a:xfrm>
+            <a:off x="3390824" y="1691640"/>
+            <a:ext cx="2567864" cy="1691640"/>
+          </a:xfrm>
+          <a:prstGeom prst="roundRect">
+            <a:avLst>
+              <a:gd name="adj" fmla="val 4324"/>
+            </a:avLst>
+          </a:prstGeom>
+          <a:solidFill>
+            <a:schemeClr val="bg2"/>
+          </a:solidFill>
+          <a:ln w="9525">
+            <a:solidFill>
+              <a:srgbClr val="C4CBD8"/>
+            </a:solidFill>
+            <a:prstDash val="solid"/>
+          </a:ln>
+        </p:spPr>
+      </p:sp>
+      <p:sp>
+        <p:nvSpPr>
+          <p:cNvPr id="9" name="Stat value"/>
+          <p:cNvSpPr txBox="1"/>
+          <p:nvPr/>
+        </p:nvSpPr>
+        <p:spPr>
+          <a:xfrm>
+            <a:off x="3527984" y="1801368"/>
+            <a:ext cx="2293544" cy="914400"/>
+          </a:xfrm>
+          <a:prstGeom prst="rect">
+            <a:avLst/>
+          </a:prstGeom>
+          <a:noFill/>
+          <a:ln/>
+        </p:spPr>
+        <p:txBody>
+          <a:bodyPr wrap="square" lIns="0" tIns="0" rIns="0" bIns="0" rtlCol="0" anchor="ctr"/>
+          <a:lstStyle/>
+          <a:p>
+            <a:pPr algn="ctr" indent="0" marL="0">
+              <a:buNone/>
+            </a:pPr>
+            <a:r>
+              <a:rPr lang="en-US" sz="4400" b="1" dirty="0">
+                <a:solidFill>
+                  <a:schemeClr val="tx1"/>
+                </a:solidFill>
+                <a:latin typeface="Cambria" pitchFamily="34" charset="0"/>
+                <a:ea typeface="Cambria" pitchFamily="34" charset="-122"/>
+                <a:cs typeface="Cambria" pitchFamily="34" charset="-120"/>
+              </a:rPr>
+              <a:t>101</a:t>
+            </a:r>
+            <a:endParaRPr lang="en-US" sz="4400" dirty="0"/>
+          </a:p>
+        </p:txBody>
+      </p:sp>
+      <p:sp>
+        <p:nvSpPr>
+          <p:cNvPr id="10" name="Stat label"/>
+          <p:cNvSpPr txBox="1"/>
+          <p:nvPr/>
+        </p:nvSpPr>
+        <p:spPr>
+          <a:xfrm>
+            <a:off x="3527984" y="2697480"/>
+            <a:ext cx="2293544" cy="612648"/>
+          </a:xfrm>
+          <a:prstGeom prst="rect">
+            <a:avLst/>
+          </a:prstGeom>
+          <a:noFill/>
+          <a:ln/>
+        </p:spPr>
+        <p:txBody>
+          <a:bodyPr wrap="square" lIns="0" tIns="0" rIns="0" bIns="0" rtlCol="0" anchor="t"/>
+          <a:lstStyle/>
+          <a:p>
+            <a:pPr algn="ctr" indent="0" marL="0">
+              <a:buNone/>
+            </a:pPr>
+            <a:r>
+              <a:rPr lang="en-US" sz="1400" dirty="0">
+                <a:solidFill>
+                  <a:schemeClr val="tx2"/>
+                </a:solidFill>
+              </a:rPr>
+              <a:t>workbook checks against the engine, ALL PASS</a:t>
+            </a:r>
+            <a:endParaRPr lang="en-US" sz="1400" dirty="0"/>
+          </a:p>
+        </p:txBody>
+      </p:sp>
+      <p:sp>
+        <p:nvSpPr>
+          <p:cNvPr id="11" name="Stat card"/>
+          <p:cNvSpPr/>
+          <p:nvPr/>
+        </p:nvSpPr>
+        <p:spPr>
+          <a:xfrm>
+            <a:off x="6233008" y="1691640"/>
+            <a:ext cx="2567864" cy="1691640"/>
+          </a:xfrm>
+          <a:prstGeom prst="roundRect">
+            <a:avLst>
+              <a:gd name="adj" fmla="val 4324"/>
+            </a:avLst>
+          </a:prstGeom>
+          <a:solidFill>
+            <a:schemeClr val="bg2"/>
+          </a:solidFill>
+          <a:ln w="9525">
+            <a:solidFill>
+              <a:srgbClr val="C4CBD8"/>
+            </a:solidFill>
+            <a:prstDash val="solid"/>
+          </a:ln>
+        </p:spPr>
+      </p:sp>
+      <p:sp>
+        <p:nvSpPr>
+          <p:cNvPr id="12" name="Stat value"/>
+          <p:cNvSpPr txBox="1"/>
+          <p:nvPr/>
+        </p:nvSpPr>
+        <p:spPr>
+          <a:xfrm>
+            <a:off x="6370168" y="1801368"/>
+            <a:ext cx="2293544" cy="914400"/>
+          </a:xfrm>
+          <a:prstGeom prst="rect">
+            <a:avLst/>
+          </a:prstGeom>
+          <a:noFill/>
+          <a:ln/>
+        </p:spPr>
+        <p:txBody>
+          <a:bodyPr wrap="square" lIns="0" tIns="0" rIns="0" bIns="0" rtlCol="0" anchor="ctr"/>
+          <a:lstStyle/>
+          <a:p>
+            <a:pPr algn="ctr" indent="0" marL="0">
+              <a:buNone/>
+            </a:pPr>
+            <a:r>
+              <a:rPr lang="en-US" sz="4400" b="1" dirty="0">
+                <a:solidFill>
+                  <a:schemeClr val="tx1"/>
+                </a:solidFill>
+                <a:latin typeface="Cambria" pitchFamily="34" charset="0"/>
+                <a:ea typeface="Cambria" pitchFamily="34" charset="-122"/>
+                <a:cs typeface="Cambria" pitchFamily="34" charset="-120"/>
+              </a:rPr>
+              <a:t>26203</a:t>
+            </a:r>
+            <a:endParaRPr lang="en-US" sz="4400" dirty="0"/>
+          </a:p>
+        </p:txBody>
+      </p:sp>
+      <p:sp>
+        <p:nvSpPr>
+          <p:cNvPr id="13" name="Stat label"/>
+          <p:cNvSpPr txBox="1"/>
+          <p:nvPr/>
+        </p:nvSpPr>
+        <p:spPr>
+          <a:xfrm>
+            <a:off x="6370168" y="2697480"/>
+            <a:ext cx="2293544" cy="612648"/>
+          </a:xfrm>
+          <a:prstGeom prst="rect">
+            <a:avLst/>
+          </a:prstGeom>
+          <a:noFill/>
+          <a:ln/>
+        </p:spPr>
+        <p:txBody>
+          <a:bodyPr wrap="square" lIns="0" tIns="0" rIns="0" bIns="0" rtlCol="0" anchor="t"/>
+          <a:lstStyle/>
+          <a:p>
+            <a:pPr algn="ctr" indent="0" marL="0">
+              <a:buNone/>
+            </a:pPr>
+            <a:r>
+              <a:rPr lang="en-US" sz="1400" dirty="0">
+                <a:solidFill>
+                  <a:schemeClr val="tx2"/>
+                </a:solidFill>
+              </a:rPr>
+              <a:t>the lab's seed</a:t>
+            </a:r>
+            <a:endParaRPr lang="en-US" sz="1400" dirty="0"/>
+          </a:p>
+        </p:txBody>
+      </p:sp>
+      <p:sp>
+        <p:nvSpPr>
+          <p:cNvPr id="14" name="Stat card"/>
+          <p:cNvSpPr/>
+          <p:nvPr/>
+        </p:nvSpPr>
+        <p:spPr>
+          <a:xfrm>
+            <a:off x="9075191" y="1691640"/>
+            <a:ext cx="2567864" cy="1691640"/>
+          </a:xfrm>
+          <a:prstGeom prst="roundRect">
+            <a:avLst>
+              <a:gd name="adj" fmla="val 4324"/>
+            </a:avLst>
+          </a:prstGeom>
+          <a:solidFill>
+            <a:schemeClr val="bg2"/>
+          </a:solidFill>
+          <a:ln w="9525">
+            <a:solidFill>
+              <a:srgbClr val="C4CBD8"/>
+            </a:solidFill>
+            <a:prstDash val="solid"/>
+          </a:ln>
+        </p:spPr>
+      </p:sp>
+      <p:sp>
+        <p:nvSpPr>
+          <p:cNvPr id="15" name="Stat value"/>
+          <p:cNvSpPr txBox="1"/>
+          <p:nvPr/>
+        </p:nvSpPr>
+        <p:spPr>
+          <a:xfrm>
+            <a:off x="9212351" y="1801368"/>
+            <a:ext cx="2293544" cy="914400"/>
+          </a:xfrm>
+          <a:prstGeom prst="rect">
+            <a:avLst/>
+          </a:prstGeom>
+          <a:noFill/>
+          <a:ln/>
+        </p:spPr>
+        <p:txBody>
+          <a:bodyPr wrap="square" lIns="0" tIns="0" rIns="0" bIns="0" rtlCol="0" anchor="ctr"/>
+          <a:lstStyle/>
+          <a:p>
+            <a:pPr algn="ctr" indent="0" marL="0">
+              <a:buNone/>
+            </a:pPr>
+            <a:r>
+              <a:rPr lang="en-US" sz="3000" b="1" dirty="0">
+                <a:solidFill>
+                  <a:schemeClr val="tx1"/>
+                </a:solidFill>
+                <a:latin typeface="Cambria" pitchFamily="34" charset="0"/>
+                <a:ea typeface="Cambria" pitchFamily="34" charset="-122"/>
+                <a:cs typeface="Cambria" pitchFamily="34" charset="-120"/>
+              </a:rPr>
+              <a:t>AXIOM-03</a:t>
+            </a:r>
+            <a:endParaRPr lang="en-US" sz="3000" dirty="0"/>
+          </a:p>
+        </p:txBody>
+      </p:sp>
+      <p:sp>
+        <p:nvSpPr>
+          <p:cNvPr id="16" name="Stat label"/>
+          <p:cNvSpPr txBox="1"/>
+          <p:nvPr/>
+        </p:nvSpPr>
+        <p:spPr>
+          <a:xfrm>
+            <a:off x="9212351" y="2697480"/>
+            <a:ext cx="2293544" cy="612648"/>
+          </a:xfrm>
+          <a:prstGeom prst="rect">
+            <a:avLst/>
+          </a:prstGeom>
+          <a:noFill/>
+          <a:ln/>
+        </p:spPr>
+        <p:txBody>
+          <a:bodyPr wrap="square" lIns="0" tIns="0" rIns="0" bIns="0" rtlCol="0" anchor="t"/>
+          <a:lstStyle/>
+          <a:p>
+            <a:pPr algn="ctr" indent="0" marL="0">
+              <a:buNone/>
+            </a:pPr>
+            <a:r>
+              <a:rPr lang="en-US" sz="1400" dirty="0">
+                <a:solidFill>
+                  <a:schemeClr val="tx2"/>
+                </a:solidFill>
+              </a:rPr>
+              <a:t>AXIOM Lab 2.3</a:t>
+            </a:r>
+            <a:endParaRPr lang="en-US" sz="1400" dirty="0"/>
+          </a:p>
+        </p:txBody>
+      </p:sp>
+      <p:sp>
+        <p:nvSpPr>
+          <p:cNvPr id="17" name="Bullets"/>
+          <p:cNvSpPr txBox="1"/>
+          <p:nvPr/>
+        </p:nvSpPr>
+        <p:spPr>
+          <a:xfrm>
+            <a:off x="548640" y="3703320"/>
+            <a:ext cx="11094415" cy="2468880"/>
+          </a:xfrm>
+          <a:prstGeom prst="rect">
+            <a:avLst/>
+          </a:prstGeom>
+          <a:noFill/>
+          <a:ln/>
+        </p:spPr>
+        <p:txBody>
+          <a:bodyPr wrap="square" lIns="635" tIns="635" rIns="635" bIns="635" rtlCol="0" anchor="t"/>
+          <a:lstStyle/>
+          <a:p>
+            <a:pPr marL="228600" indent="-228600">
+              <a:spcAft>
+                <a:spcPts val="800"/>
+              </a:spcAft>
+              <a:buSzPct val="100000"/>
+              <a:buChar char="•"/>
+            </a:pPr>
+            <a:r>
+              <a:rPr lang="en-US" sz="1700" b="1" dirty="0">
+                <a:solidFill>
+                  <a:schemeClr val="tx1"/>
+                </a:solidFill>
+              </a:rPr>
+              <a:t>Notebook</a:t>
+            </a:r>
+            <a:r>
+              <a:rPr lang="en-US" sz="1700" dirty="0">
+                <a:solidFill>
+                  <a:schemeClr val="tx1"/>
+                </a:solidFill>
+              </a:rPr>
+              <a:t> DCT_V2_Ch03_Lab.ipynb: Worked Example 3.1 and the lab's five steps in seven panels, with an interior-point method written out in numpy, ready for Colab</a:t>
+            </a:r>
+            <a:endParaRPr lang="en-US" sz="1700" dirty="0"/>
+          </a:p>
+          <a:p>
+            <a:pPr marL="228600" indent="-228600">
+              <a:spcAft>
+                <a:spcPts val="800"/>
+              </a:spcAft>
+              <a:buSzPct val="100000"/>
+              <a:buChar char="•"/>
+            </a:pPr>
+            <a:r>
+              <a:rPr lang="en-US" sz="1700" b="1" dirty="0">
+                <a:solidFill>
+                  <a:schemeClr val="tx1"/>
+                </a:solidFill>
+              </a:rPr>
+              <a:t>Workbook</a:t>
+            </a:r>
+            <a:r>
+              <a:rPr lang="en-US" sz="1700" dirty="0">
+                <a:solidFill>
+                  <a:schemeClr val="tx1"/>
+                </a:solidFill>
+              </a:rPr>
+              <a:t> DCT_V2_Ch03_Lab.xlsx: the 64 lumpy plans, the closed form with its prices and KKT residuals, Table 3.5 and the capital cap, in formulas</a:t>
+            </a:r>
+            <a:endParaRPr lang="en-US" sz="1700" dirty="0"/>
+          </a:p>
+          <a:p>
+            <a:pPr marL="228600" indent="-228600">
+              <a:spcAft>
+                <a:spcPts val="800"/>
+              </a:spcAft>
+              <a:buSzPct val="100000"/>
+              <a:buChar char="•"/>
+            </a:pPr>
+            <a:r>
+              <a:rPr lang="en-US" sz="1700" dirty="0">
+                <a:solidFill>
+                  <a:schemeClr val="tx1"/>
+                </a:solidFill>
+              </a:rPr>
+              <a:t>Every number on these slides is the book's, and both companions check it</a:t>
+            </a:r>
+            <a:endParaRPr lang="en-US" sz="1700" dirty="0"/>
+          </a:p>
+        </p:txBody>
+      </p:sp>
+      <p:sp>
+        <p:nvSpPr>
+          <p:cNvPr id="25" name="Slide Number Placeholder 0"/>
+          <p:cNvSpPr>
+            <a:spLocks noGrp="1"/>
+          </p:cNvSpPr>
+          <p:nvPr>
+            <p:ph type="sldNum" sz="quarter" idx="4294967295"/>
+          </p:nvPr>
+        </p:nvSpPr>
+        <p:spPr>
+          <a:xfrm>
+            <a:off x="11094415" y="6382512"/>
+            <a:ext cx="548640" cy="237744"/>
+          </a:xfrm>
+          <a:prstGeom prst="rect">
+            <a:avLst/>
+          </a:prstGeom>
+          <a:extLst>
+            <a:ext uri="{C572A759-6A51-4108-AA02-DFA0A04FC94B}">
+              <ma14:wrappingTextBoxFlag xmlns:ma14="http://schemas.microsoft.com/office/mac/drawingml/2011/main" val="0"/>
+            </a:ext>
+          </a:extLst>
+        </p:spPr>
+        <p:txBody>
+          <a:bodyPr/>
+          <a:lstStyle>
+            <a:lvl1pPr>
+              <a:defRPr sz="1000">
+                <a:solidFill>
+                  <a:srgbClr val="5A6B82"/>
+                </a:solidFill>
+              </a:defRPr>
+            </a:lvl1pPr>
+          </a:lstStyle>
+          <a:p>
+            <a:pPr algn="r"/>
+            <a:fld id="{F7021451-1387-4CA6-816F-3879F97B5CBC}" type="slidenum">
+              <a:rPr b="0" lang="en-US"/>
+              <a:t>24</a:t>
+            </a:fld>
+            <a:endParaRPr lang="en-US"/>
+          </a:p>
+        </p:txBody>
+      </p:sp>
+    </p:spTree>
+  </p:cSld>
+  <p:clrMapOvr>
+    <a:masterClrMapping/>
+  </p:clrMapOvr>
+</p:sld>
+</file>
+
+<file path=ppt/slides/slide25.xml><?xml version="1.0" encoding="utf-8"?>
+<p:sld xmlns:a="http://schemas.openxmlformats.org/drawingml/2006/main" xmlns:r="http://schemas.openxmlformats.org/officeDocument/2006/relationships" xmlns:p="http://schemas.openxmlformats.org/presentationml/2006/main">
+  <p:cSld name="Slide 25">
+    <p:spTree>
+      <p:nvGrpSpPr>
+        <p:cNvPr id="1" name=""/>
+        <p:cNvGrpSpPr/>
+        <p:nvPr/>
+      </p:nvGrpSpPr>
+      <p:grpSpPr>
+        <a:xfrm>
+          <a:off x="0" y="0"/>
+          <a:ext cx="0" cy="0"/>
+          <a:chOff x="0" y="0"/>
+          <a:chExt cx="0" cy="0"/>
+        </a:xfrm>
+      </p:grpSpPr>
+      <p:sp>
+        <p:nvSpPr>
+          <p:cNvPr id="3" name="Text 1"/>
+          <p:cNvSpPr/>
+          <p:nvPr>
+            <p:ph idx="102" type="body" hasCustomPrompt="1"/>
+          </p:nvPr>
+        </p:nvSpPr>
+        <p:spPr>
+          <a:xfrm>
+            <a:off x="548640" y="347472"/>
+            <a:ext cx="11094415" cy="292608"/>
+          </a:xfrm>
+          <a:prstGeom prst="rect">
+            <a:avLst/>
+          </a:prstGeom>
+          <a:noFill/>
+          <a:ln/>
+        </p:spPr>
+        <p:txBody>
+          <a:bodyPr wrap="square" lIns="0" tIns="0" rIns="0" bIns="0" rtlCol="0"/>
+          <a:lstStyle/>
+          <a:p>
+            <a:pPr indent="0" marL="0">
+              <a:buNone/>
+            </a:pPr>
+            <a:r>
+              <a:rPr lang="en-US" sz="1200" b="1" spc="200" kern="0" dirty="0">
+                <a:solidFill>
+                  <a:schemeClr val="accent1"/>
+                </a:solidFill>
+              </a:rPr>
               <a:t>NEXT · CHAPTER 4</a:t>
             </a:r>
             <a:endParaRPr lang="en-US" sz="1200" dirty="0"/>
@@ -17848,7 +18919,7 @@
             <a:pPr algn="r"/>
             <a:fld id="{F7021451-1387-4CA6-816F-3879F97B5CBC}" type="slidenum">
               <a:rPr b="0" lang="en-US"/>
-              <a:t>24</a:t>
+              <a:t>25</a:t>
             </a:fld>
             <a:endParaRPr lang="en-US"/>
           </a:p>
@@ -18601,7 +19672,7 @@
                 <a:ea typeface="Cambria" pitchFamily="34" charset="-122"/>
                 <a:cs typeface="Cambria" pitchFamily="34" charset="-120"/>
               </a:rPr>
-              <a:t>Six sections, a worked example and a lab</a:t>
+              <a:t>Six sections, a worked example, a case and a lab</a:t>
             </a:r>
             <a:endParaRPr lang="en-US" sz="3200" dirty="0"/>
           </a:p>
@@ -18616,11 +19687,11 @@
         <p:spPr>
           <a:xfrm>
             <a:off x="548640" y="1691640"/>
-            <a:ext cx="2567864" cy="2103120"/>
+            <a:ext cx="1999427" cy="2103120"/>
           </a:xfrm>
           <a:prstGeom prst="roundRect">
             <a:avLst>
-              <a:gd name="adj" fmla="val 3478"/>
+              <a:gd name="adj" fmla="val 3659"/>
             </a:avLst>
           </a:prstGeom>
           <a:solidFill>
@@ -18643,7 +19714,7 @@
         <p:spPr>
           <a:xfrm>
             <a:off x="731520" y="1819656"/>
-            <a:ext cx="2202104" cy="310896"/>
+            <a:ext cx="1633667" cy="310896"/>
           </a:xfrm>
           <a:prstGeom prst="rect">
             <a:avLst/>
@@ -18679,7 +19750,7 @@
         <p:spPr>
           <a:xfrm>
             <a:off x="731520" y="2148840"/>
-            <a:ext cx="2202104" cy="1060704"/>
+            <a:ext cx="1633667" cy="1060704"/>
           </a:xfrm>
           <a:prstGeom prst="rect">
             <a:avLst/>
@@ -18695,7 +19766,7 @@
               <a:buNone/>
             </a:pPr>
             <a:r>
-              <a:rPr lang="en-US" sz="1500" b="1" dirty="0">
+              <a:rPr lang="en-US" sz="1300" b="1" dirty="0">
                 <a:solidFill>
                   <a:schemeClr val="tx1"/>
                 </a:solidFill>
@@ -18705,7 +19776,7 @@
               </a:rPr>
               <a:t>What Convexity Buys</a:t>
             </a:r>
-            <a:endParaRPr lang="en-US" sz="1500" dirty="0"/>
+            <a:endParaRPr lang="en-US" sz="1300" dirty="0"/>
           </a:p>
         </p:txBody>
       </p:sp>
@@ -18718,7 +19789,7 @@
         <p:spPr>
           <a:xfrm>
             <a:off x="731520" y="3282696"/>
-            <a:ext cx="2202104" cy="384048"/>
+            <a:ext cx="1633667" cy="384048"/>
           </a:xfrm>
           <a:prstGeom prst="rect">
             <a:avLst/>
@@ -18734,14 +19805,14 @@
               <a:buNone/>
             </a:pPr>
             <a:r>
-              <a:rPr lang="en-US" sz="1300" dirty="0">
+              <a:rPr lang="en-US" sz="1200" dirty="0">
                 <a:solidFill>
                   <a:schemeClr val="tx2"/>
                 </a:solidFill>
               </a:rPr>
               <a:t>Table 3.1 · four promises</a:t>
             </a:r>
-            <a:endParaRPr lang="en-US" sz="1300" dirty="0"/>
+            <a:endParaRPr lang="en-US" sz="1200" dirty="0"/>
           </a:p>
         </p:txBody>
       </p:sp>
@@ -18753,12 +19824,12 @@
         </p:nvSpPr>
         <p:spPr>
           <a:xfrm>
-            <a:off x="3390824" y="1691640"/>
-            <a:ext cx="2567864" cy="2103120"/>
+            <a:off x="2822387" y="1691640"/>
+            <a:ext cx="1999427" cy="2103120"/>
           </a:xfrm>
           <a:prstGeom prst="roundRect">
             <a:avLst>
-              <a:gd name="adj" fmla="val 3478"/>
+              <a:gd name="adj" fmla="val 3659"/>
             </a:avLst>
           </a:prstGeom>
           <a:solidFill>
@@ -18780,8 +19851,8 @@
         </p:nvSpPr>
         <p:spPr>
           <a:xfrm>
-            <a:off x="3573704" y="1819656"/>
-            <a:ext cx="2202104" cy="310896"/>
+            <a:off x="3005267" y="1819656"/>
+            <a:ext cx="1633667" cy="310896"/>
           </a:xfrm>
           <a:prstGeom prst="rect">
             <a:avLst/>
@@ -18816,8 +19887,8 @@
         </p:nvSpPr>
         <p:spPr>
           <a:xfrm>
-            <a:off x="3573704" y="2148840"/>
-            <a:ext cx="2202104" cy="1060704"/>
+            <a:off x="3005267" y="2148840"/>
+            <a:ext cx="1633667" cy="1060704"/>
           </a:xfrm>
           <a:prstGeom prst="rect">
             <a:avLst/>
@@ -18833,7 +19904,7 @@
               <a:buNone/>
             </a:pPr>
             <a:r>
-              <a:rPr lang="en-US" sz="1500" b="1" dirty="0">
+              <a:rPr lang="en-US" sz="1300" b="1" dirty="0">
                 <a:solidFill>
                   <a:schemeClr val="tx1"/>
                 </a:solidFill>
@@ -18843,7 +19914,7 @@
               </a:rPr>
               <a:t>Recognizing Convexity</a:t>
             </a:r>
-            <a:endParaRPr lang="en-US" sz="1500" dirty="0"/>
+            <a:endParaRPr lang="en-US" sz="1300" dirty="0"/>
           </a:p>
         </p:txBody>
       </p:sp>
@@ -18855,8 +19926,8 @@
         </p:nvSpPr>
         <p:spPr>
           <a:xfrm>
-            <a:off x="3573704" y="3282696"/>
-            <a:ext cx="2202104" cy="384048"/>
+            <a:off x="3005267" y="3282696"/>
+            <a:ext cx="1633667" cy="384048"/>
           </a:xfrm>
           <a:prstGeom prst="rect">
             <a:avLst/>
@@ -18872,14 +19943,14 @@
               <a:buNone/>
             </a:pPr>
             <a:r>
-              <a:rPr lang="en-US" sz="1300" dirty="0">
+              <a:rPr lang="en-US" sz="1200" dirty="0">
                 <a:solidFill>
                   <a:schemeClr val="tx2"/>
                 </a:solidFill>
               </a:rPr>
               <a:t>Definitions 3.1–3.2 · Table 3.2 · Figure 3.1</a:t>
             </a:r>
-            <a:endParaRPr lang="en-US" sz="1300" dirty="0"/>
+            <a:endParaRPr lang="en-US" sz="1200" dirty="0"/>
           </a:p>
         </p:txBody>
       </p:sp>
@@ -18891,12 +19962,12 @@
         </p:nvSpPr>
         <p:spPr>
           <a:xfrm>
-            <a:off x="6233008" y="1691640"/>
-            <a:ext cx="2567864" cy="2103120"/>
+            <a:off x="5096134" y="1691640"/>
+            <a:ext cx="1999427" cy="2103120"/>
           </a:xfrm>
           <a:prstGeom prst="roundRect">
             <a:avLst>
-              <a:gd name="adj" fmla="val 3478"/>
+              <a:gd name="adj" fmla="val 3659"/>
             </a:avLst>
           </a:prstGeom>
           <a:solidFill>
@@ -18918,8 +19989,8 @@
         </p:nvSpPr>
         <p:spPr>
           <a:xfrm>
-            <a:off x="6415888" y="1819656"/>
-            <a:ext cx="2202104" cy="310896"/>
+            <a:off x="5279014" y="1819656"/>
+            <a:ext cx="1633667" cy="310896"/>
           </a:xfrm>
           <a:prstGeom prst="rect">
             <a:avLst/>
@@ -18954,8 +20025,8 @@
         </p:nvSpPr>
         <p:spPr>
           <a:xfrm>
-            <a:off x="6415888" y="2148840"/>
-            <a:ext cx="2202104" cy="1060704"/>
+            <a:off x="5279014" y="2148840"/>
+            <a:ext cx="1633667" cy="1060704"/>
           </a:xfrm>
           <a:prstGeom prst="rect">
             <a:avLst/>
@@ -18971,7 +20042,7 @@
               <a:buNone/>
             </a:pPr>
             <a:r>
-              <a:rPr lang="en-US" sz="1500" b="1" dirty="0">
+              <a:rPr lang="en-US" sz="1300" b="1" dirty="0">
                 <a:solidFill>
                   <a:schemeClr val="tx1"/>
                 </a:solidFill>
@@ -18981,7 +20052,7 @@
               </a:rPr>
               <a:t>Convex Instances and Global Answers</a:t>
             </a:r>
-            <a:endParaRPr lang="en-US" sz="1500" dirty="0"/>
+            <a:endParaRPr lang="en-US" sz="1300" dirty="0"/>
           </a:p>
         </p:txBody>
       </p:sp>
@@ -18993,8 +20064,8 @@
         </p:nvSpPr>
         <p:spPr>
           <a:xfrm>
-            <a:off x="6415888" y="3282696"/>
-            <a:ext cx="2202104" cy="384048"/>
+            <a:off x="5279014" y="3282696"/>
+            <a:ext cx="1633667" cy="384048"/>
           </a:xfrm>
           <a:prstGeom prst="rect">
             <a:avLst/>
@@ -19010,14 +20081,14 @@
               <a:buNone/>
             </a:pPr>
             <a:r>
-              <a:rPr lang="en-US" sz="1300" dirty="0">
+              <a:rPr lang="en-US" sz="1200" dirty="0">
                 <a:solidFill>
                   <a:schemeClr val="tx2"/>
                 </a:solidFill>
               </a:rPr>
               <a:t>Definition 3.3 · Proposition 3.1 · Theorems 3.1–3.2</a:t>
             </a:r>
-            <a:endParaRPr lang="en-US" sz="1300" dirty="0"/>
+            <a:endParaRPr lang="en-US" sz="1200" dirty="0"/>
           </a:p>
         </p:txBody>
       </p:sp>
@@ -19029,12 +20100,12 @@
         </p:nvSpPr>
         <p:spPr>
           <a:xfrm>
-            <a:off x="9075191" y="1691640"/>
-            <a:ext cx="2567864" cy="2103120"/>
+            <a:off x="7369881" y="1691640"/>
+            <a:ext cx="1999427" cy="2103120"/>
           </a:xfrm>
           <a:prstGeom prst="roundRect">
             <a:avLst>
-              <a:gd name="adj" fmla="val 3478"/>
+              <a:gd name="adj" fmla="val 3659"/>
             </a:avLst>
           </a:prstGeom>
           <a:solidFill>
@@ -19056,8 +20127,8 @@
         </p:nvSpPr>
         <p:spPr>
           <a:xfrm>
-            <a:off x="9258071" y="1819656"/>
-            <a:ext cx="2202104" cy="310896"/>
+            <a:off x="7552761" y="1819656"/>
+            <a:ext cx="1633667" cy="310896"/>
           </a:xfrm>
           <a:prstGeom prst="rect">
             <a:avLst/>
@@ -19092,8 +20163,8 @@
         </p:nvSpPr>
         <p:spPr>
           <a:xfrm>
-            <a:off x="9258071" y="2148840"/>
-            <a:ext cx="2202104" cy="1060704"/>
+            <a:off x="7552761" y="2148840"/>
+            <a:ext cx="1633667" cy="1060704"/>
           </a:xfrm>
           <a:prstGeom prst="rect">
             <a:avLst/>
@@ -19109,7 +20180,7 @@
               <a:buNone/>
             </a:pPr>
             <a:r>
-              <a:rPr lang="en-US" sz="1500" b="1" dirty="0">
+              <a:rPr lang="en-US" sz="1300" b="1" dirty="0">
                 <a:solidFill>
                   <a:schemeClr val="tx1"/>
                 </a:solidFill>
@@ -19119,7 +20190,7 @@
               </a:rPr>
               <a:t>Duality: Prices You Can Check</a:t>
             </a:r>
-            <a:endParaRPr lang="en-US" sz="1500" dirty="0"/>
+            <a:endParaRPr lang="en-US" sz="1300" dirty="0"/>
           </a:p>
         </p:txBody>
       </p:sp>
@@ -19131,8 +20202,8 @@
         </p:nvSpPr>
         <p:spPr>
           <a:xfrm>
-            <a:off x="9258071" y="3282696"/>
-            <a:ext cx="2202104" cy="384048"/>
+            <a:off x="7552761" y="3282696"/>
+            <a:ext cx="1633667" cy="384048"/>
           </a:xfrm>
           <a:prstGeom prst="rect">
             <a:avLst/>
@@ -19148,14 +20219,14 @@
               <a:buNone/>
             </a:pPr>
             <a:r>
-              <a:rPr lang="en-US" sz="1300" dirty="0">
+              <a:rPr lang="en-US" sz="1200" dirty="0">
                 <a:solidFill>
                   <a:schemeClr val="tx2"/>
                 </a:solidFill>
               </a:rPr>
               <a:t>Theorems 3.3–3.5 · Figure 3.2</a:t>
             </a:r>
-            <a:endParaRPr lang="en-US" sz="1300" dirty="0"/>
+            <a:endParaRPr lang="en-US" sz="1200" dirty="0"/>
           </a:p>
         </p:txBody>
       </p:sp>
@@ -19167,12 +20238,12 @@
         </p:nvSpPr>
         <p:spPr>
           <a:xfrm>
-            <a:off x="548640" y="4069080"/>
-            <a:ext cx="2567864" cy="2103120"/>
+            <a:off x="9643628" y="1691640"/>
+            <a:ext cx="1999427" cy="2103120"/>
           </a:xfrm>
           <a:prstGeom prst="roundRect">
             <a:avLst>
-              <a:gd name="adj" fmla="val 3478"/>
+              <a:gd name="adj" fmla="val 3659"/>
             </a:avLst>
           </a:prstGeom>
           <a:solidFill>
@@ -19194,8 +20265,8 @@
         </p:nvSpPr>
         <p:spPr>
           <a:xfrm>
-            <a:off x="731520" y="4197096"/>
-            <a:ext cx="2202104" cy="310896"/>
+            <a:off x="9826508" y="1819656"/>
+            <a:ext cx="1633667" cy="310896"/>
           </a:xfrm>
           <a:prstGeom prst="rect">
             <a:avLst/>
@@ -19230,8 +20301,8 @@
         </p:nvSpPr>
         <p:spPr>
           <a:xfrm>
-            <a:off x="731520" y="4526280"/>
-            <a:ext cx="2202104" cy="1060704"/>
+            <a:off x="9826508" y="2148840"/>
+            <a:ext cx="1633667" cy="1060704"/>
           </a:xfrm>
           <a:prstGeom prst="rect">
             <a:avLst/>
@@ -19247,7 +20318,7 @@
               <a:buNone/>
             </a:pPr>
             <a:r>
-              <a:rPr lang="en-US" sz="1500" b="1" dirty="0">
+              <a:rPr lang="en-US" sz="1300" b="1" dirty="0">
                 <a:solidFill>
                   <a:schemeClr val="tx1"/>
                 </a:solidFill>
@@ -19257,7 +20328,7 @@
               </a:rPr>
               <a:t>Rewriting Commitments in Convex Form</a:t>
             </a:r>
-            <a:endParaRPr lang="en-US" sz="1500" dirty="0"/>
+            <a:endParaRPr lang="en-US" sz="1300" dirty="0"/>
           </a:p>
         </p:txBody>
       </p:sp>
@@ -19269,8 +20340,8 @@
         </p:nvSpPr>
         <p:spPr>
           <a:xfrm>
-            <a:off x="731520" y="5660136"/>
-            <a:ext cx="2202104" cy="384048"/>
+            <a:off x="9826508" y="3282696"/>
+            <a:ext cx="1633667" cy="384048"/>
           </a:xfrm>
           <a:prstGeom prst="rect">
             <a:avLst/>
@@ -19286,14 +20357,14 @@
               <a:buNone/>
             </a:pPr>
             <a:r>
-              <a:rPr lang="en-US" sz="1300" dirty="0">
+              <a:rPr lang="en-US" sz="1200" dirty="0">
                 <a:solidFill>
                   <a:schemeClr val="tx2"/>
                 </a:solidFill>
               </a:rPr>
               <a:t>Definition 3.5 · Theorem 3.6 · Table 3.3</a:t>
             </a:r>
-            <a:endParaRPr lang="en-US" sz="1300" dirty="0"/>
+            <a:endParaRPr lang="en-US" sz="1200" dirty="0"/>
           </a:p>
         </p:txBody>
       </p:sp>
@@ -19305,12 +20376,12 @@
         </p:nvSpPr>
         <p:spPr>
           <a:xfrm>
-            <a:off x="3390824" y="4069080"/>
-            <a:ext cx="2567864" cy="2103120"/>
+            <a:off x="548640" y="4069080"/>
+            <a:ext cx="1999427" cy="2103120"/>
           </a:xfrm>
           <a:prstGeom prst="roundRect">
             <a:avLst>
-              <a:gd name="adj" fmla="val 3478"/>
+              <a:gd name="adj" fmla="val 3659"/>
             </a:avLst>
           </a:prstGeom>
           <a:solidFill>
@@ -19332,8 +20403,8 @@
         </p:nvSpPr>
         <p:spPr>
           <a:xfrm>
-            <a:off x="3573704" y="4197096"/>
-            <a:ext cx="2202104" cy="310896"/>
+            <a:off x="731520" y="4197096"/>
+            <a:ext cx="1633667" cy="310896"/>
           </a:xfrm>
           <a:prstGeom prst="rect">
             <a:avLst/>
@@ -19368,8 +20439,8 @@
         </p:nvSpPr>
         <p:spPr>
           <a:xfrm>
-            <a:off x="3573704" y="4526280"/>
-            <a:ext cx="2202104" cy="1060704"/>
+            <a:off x="731520" y="4526280"/>
+            <a:ext cx="1633667" cy="1060704"/>
           </a:xfrm>
           <a:prstGeom prst="rect">
             <a:avLst/>
@@ -19385,7 +20456,7 @@
               <a:buNone/>
             </a:pPr>
             <a:r>
-              <a:rPr lang="en-US" sz="1500" b="1" dirty="0">
+              <a:rPr lang="en-US" sz="1300" b="1" dirty="0">
                 <a:solidFill>
                   <a:schemeClr val="tx1"/>
                 </a:solidFill>
@@ -19395,7 +20466,7 @@
               </a:rPr>
               <a:t>Solving, Certifying, and Bounding</a:t>
             </a:r>
-            <a:endParaRPr lang="en-US" sz="1500" dirty="0"/>
+            <a:endParaRPr lang="en-US" sz="1300" dirty="0"/>
           </a:p>
         </p:txBody>
       </p:sp>
@@ -19407,8 +20478,8 @@
         </p:nvSpPr>
         <p:spPr>
           <a:xfrm>
-            <a:off x="3573704" y="5660136"/>
-            <a:ext cx="2202104" cy="384048"/>
+            <a:off x="731520" y="5660136"/>
+            <a:ext cx="1633667" cy="384048"/>
           </a:xfrm>
           <a:prstGeom prst="rect">
             <a:avLst/>
@@ -19424,14 +20495,14 @@
               <a:buNone/>
             </a:pPr>
             <a:r>
-              <a:rPr lang="en-US" sz="1300" dirty="0">
+              <a:rPr lang="en-US" sz="1200" dirty="0">
                 <a:solidFill>
                   <a:schemeClr val="tx2"/>
                 </a:solidFill>
               </a:rPr>
               <a:t>Table 3.4 · Definition 3.6 · Proposition 3.2</a:t>
             </a:r>
-            <a:endParaRPr lang="en-US" sz="1300" dirty="0"/>
+            <a:endParaRPr lang="en-US" sz="1200" dirty="0"/>
           </a:p>
         </p:txBody>
       </p:sp>
@@ -19443,12 +20514,12 @@
         </p:nvSpPr>
         <p:spPr>
           <a:xfrm>
-            <a:off x="6233008" y="4069080"/>
-            <a:ext cx="2567864" cy="2103120"/>
+            <a:off x="2822387" y="4069080"/>
+            <a:ext cx="1999427" cy="2103120"/>
           </a:xfrm>
           <a:prstGeom prst="roundRect">
             <a:avLst>
-              <a:gd name="adj" fmla="val 3478"/>
+              <a:gd name="adj" fmla="val 3659"/>
             </a:avLst>
           </a:prstGeom>
           <a:solidFill>
@@ -19470,8 +20541,8 @@
         </p:nvSpPr>
         <p:spPr>
           <a:xfrm>
-            <a:off x="6415888" y="4197096"/>
-            <a:ext cx="2202104" cy="310896"/>
+            <a:off x="3005267" y="4197096"/>
+            <a:ext cx="1633667" cy="310896"/>
           </a:xfrm>
           <a:prstGeom prst="rect">
             <a:avLst/>
@@ -19506,8 +20577,8 @@
         </p:nvSpPr>
         <p:spPr>
           <a:xfrm>
-            <a:off x="6415888" y="4526280"/>
-            <a:ext cx="2202104" cy="1060704"/>
+            <a:off x="3005267" y="4526280"/>
+            <a:ext cx="1633667" cy="1060704"/>
           </a:xfrm>
           <a:prstGeom prst="rect">
             <a:avLst/>
@@ -19523,7 +20594,7 @@
               <a:buNone/>
             </a:pPr>
             <a:r>
-              <a:rPr lang="en-US" sz="1500" b="1" dirty="0">
+              <a:rPr lang="en-US" sz="1300" b="1" dirty="0">
                 <a:solidFill>
                   <a:schemeClr val="bg1"/>
                 </a:solidFill>
@@ -19533,7 +20604,7 @@
               </a:rPr>
               <a:t>How Good Is the Three-Round Plan?</a:t>
             </a:r>
-            <a:endParaRPr lang="en-US" sz="1500" dirty="0"/>
+            <a:endParaRPr lang="en-US" sz="1300" dirty="0"/>
           </a:p>
         </p:txBody>
       </p:sp>
@@ -19545,8 +20616,8 @@
         </p:nvSpPr>
         <p:spPr>
           <a:xfrm>
-            <a:off x="6415888" y="5660136"/>
-            <a:ext cx="2202104" cy="384048"/>
+            <a:off x="3005267" y="5660136"/>
+            <a:ext cx="1633667" cy="384048"/>
           </a:xfrm>
           <a:prstGeom prst="rect">
             <a:avLst/>
@@ -19562,14 +20633,14 @@
               <a:buNone/>
             </a:pPr>
             <a:r>
-              <a:rPr lang="en-US" sz="1300" dirty="0">
+              <a:rPr lang="en-US" sz="1200" dirty="0">
                 <a:solidFill>
                   <a:schemeClr val="bg2"/>
                 </a:solidFill>
               </a:rPr>
               <a:t>Table 3.5 · Figure 3.3</a:t>
             </a:r>
-            <a:endParaRPr lang="en-US" sz="1300" dirty="0"/>
+            <a:endParaRPr lang="en-US" sz="1200" dirty="0"/>
           </a:p>
         </p:txBody>
       </p:sp>
@@ -19581,12 +20652,12 @@
         </p:nvSpPr>
         <p:spPr>
           <a:xfrm>
-            <a:off x="9075191" y="4069080"/>
-            <a:ext cx="2567864" cy="2103120"/>
+            <a:off x="5096134" y="4069080"/>
+            <a:ext cx="1999427" cy="2103120"/>
           </a:xfrm>
           <a:prstGeom prst="roundRect">
             <a:avLst>
-              <a:gd name="adj" fmla="val 3478"/>
+              <a:gd name="adj" fmla="val 3659"/>
             </a:avLst>
           </a:prstGeom>
           <a:solidFill>
@@ -19608,8 +20679,8 @@
         </p:nvSpPr>
         <p:spPr>
           <a:xfrm>
-            <a:off x="9258071" y="4197096"/>
-            <a:ext cx="2202104" cy="310896"/>
+            <a:off x="5279014" y="4197096"/>
+            <a:ext cx="1633667" cy="310896"/>
           </a:xfrm>
           <a:prstGeom prst="rect">
             <a:avLst/>
@@ -19630,7 +20701,7 @@
                   <a:schemeClr val="accent1"/>
                 </a:solidFill>
               </a:rPr>
-              <a:t>AXIOM Lab 2.3</a:t>
+              <a:t>In Practice</a:t>
             </a:r>
             <a:endParaRPr lang="en-US" sz="1300" dirty="0"/>
           </a:p>
@@ -19644,8 +20715,8 @@
         </p:nvSpPr>
         <p:spPr>
           <a:xfrm>
-            <a:off x="9258071" y="4526280"/>
-            <a:ext cx="2202104" cy="1060704"/>
+            <a:off x="5279014" y="4526280"/>
+            <a:ext cx="1633667" cy="1060704"/>
           </a:xfrm>
           <a:prstGeom prst="rect">
             <a:avLst/>
@@ -19661,7 +20732,7 @@
               <a:buNone/>
             </a:pPr>
             <a:r>
-              <a:rPr lang="en-US" sz="1500" b="1" dirty="0">
+              <a:rPr lang="en-US" sz="1300" b="1" dirty="0">
                 <a:solidFill>
                   <a:schemeClr val="tx1"/>
                 </a:solidFill>
@@ -19669,9 +20740,9 @@
                 <a:ea typeface="Cambria" pitchFamily="34" charset="-122"/>
                 <a:cs typeface="Cambria" pitchFamily="34" charset="-120"/>
               </a:rPr>
-              <a:t>Convex Models, Prices, and Certificates</a:t>
-            </a:r>
-            <a:endParaRPr lang="en-US" sz="1500" dirty="0"/>
+              <a:t>MISO Prices Power with Its Multipliers</a:t>
+            </a:r>
+            <a:endParaRPr lang="en-US" sz="1300" dirty="0"/>
           </a:p>
         </p:txBody>
       </p:sp>
@@ -19683,8 +20754,8 @@
         </p:nvSpPr>
         <p:spPr>
           <a:xfrm>
-            <a:off x="9258071" y="5660136"/>
-            <a:ext cx="2202104" cy="384048"/>
+            <a:off x="5279014" y="5660136"/>
+            <a:ext cx="1633667" cy="384048"/>
           </a:xfrm>
           <a:prstGeom prst="rect">
             <a:avLst/>
@@ -19700,14 +20771,152 @@
               <a:buNone/>
             </a:pPr>
             <a:r>
-              <a:rPr lang="en-US" sz="1300" dirty="0">
+              <a:rPr lang="en-US" sz="1200" dirty="0">
                 <a:solidFill>
                   <a:schemeClr val="tx2"/>
                 </a:solidFill>
               </a:rPr>
+              <a:t>At a Glance · board questions</a:t>
+            </a:r>
+            <a:endParaRPr lang="en-US" sz="1200" dirty="0"/>
+          </a:p>
+        </p:txBody>
+      </p:sp>
+      <p:sp>
+        <p:nvSpPr>
+          <p:cNvPr id="37" name="Card"/>
+          <p:cNvSpPr/>
+          <p:nvPr/>
+        </p:nvSpPr>
+        <p:spPr>
+          <a:xfrm>
+            <a:off x="7369881" y="4069080"/>
+            <a:ext cx="1999427" cy="2103120"/>
+          </a:xfrm>
+          <a:prstGeom prst="roundRect">
+            <a:avLst>
+              <a:gd name="adj" fmla="val 3659"/>
+            </a:avLst>
+          </a:prstGeom>
+          <a:solidFill>
+            <a:schemeClr val="bg2"/>
+          </a:solidFill>
+          <a:ln w="9525">
+            <a:solidFill>
+              <a:srgbClr val="C4CBD8"/>
+            </a:solidFill>
+            <a:prstDash val="solid"/>
+          </a:ln>
+        </p:spPr>
+      </p:sp>
+      <p:sp>
+        <p:nvSpPr>
+          <p:cNvPr id="38" name="Card label"/>
+          <p:cNvSpPr txBox="1"/>
+          <p:nvPr/>
+        </p:nvSpPr>
+        <p:spPr>
+          <a:xfrm>
+            <a:off x="7552761" y="4197096"/>
+            <a:ext cx="1633667" cy="310896"/>
+          </a:xfrm>
+          <a:prstGeom prst="rect">
+            <a:avLst/>
+          </a:prstGeom>
+          <a:noFill/>
+          <a:ln/>
+        </p:spPr>
+        <p:txBody>
+          <a:bodyPr wrap="square" lIns="0" tIns="0" rIns="0" bIns="0" rtlCol="0" anchor="ctr"/>
+          <a:lstStyle/>
+          <a:p>
+            <a:pPr indent="0" marL="0">
+              <a:buNone/>
+            </a:pPr>
+            <a:r>
+              <a:rPr lang="en-US" sz="1300" b="1" dirty="0">
+                <a:solidFill>
+                  <a:schemeClr val="accent1"/>
+                </a:solidFill>
+              </a:rPr>
+              <a:t>AXIOM Lab 2.3</a:t>
+            </a:r>
+            <a:endParaRPr lang="en-US" sz="1300" dirty="0"/>
+          </a:p>
+        </p:txBody>
+      </p:sp>
+      <p:sp>
+        <p:nvSpPr>
+          <p:cNvPr id="39" name="Card head"/>
+          <p:cNvSpPr txBox="1"/>
+          <p:nvPr/>
+        </p:nvSpPr>
+        <p:spPr>
+          <a:xfrm>
+            <a:off x="7552761" y="4526280"/>
+            <a:ext cx="1633667" cy="1060704"/>
+          </a:xfrm>
+          <a:prstGeom prst="rect">
+            <a:avLst/>
+          </a:prstGeom>
+          <a:noFill/>
+          <a:ln/>
+        </p:spPr>
+        <p:txBody>
+          <a:bodyPr wrap="square" lIns="0" tIns="0" rIns="0" bIns="0" rtlCol="0" anchor="t"/>
+          <a:lstStyle/>
+          <a:p>
+            <a:pPr indent="0" marL="0">
+              <a:buNone/>
+            </a:pPr>
+            <a:r>
+              <a:rPr lang="en-US" sz="1300" b="1" dirty="0">
+                <a:solidFill>
+                  <a:schemeClr val="tx1"/>
+                </a:solidFill>
+                <a:latin typeface="Cambria" pitchFamily="34" charset="0"/>
+                <a:ea typeface="Cambria" pitchFamily="34" charset="-122"/>
+                <a:cs typeface="Cambria" pitchFamily="34" charset="-120"/>
+              </a:rPr>
+              <a:t>Convex Models, Prices, and Certificates</a:t>
+            </a:r>
+            <a:endParaRPr lang="en-US" sz="1300" dirty="0"/>
+          </a:p>
+        </p:txBody>
+      </p:sp>
+      <p:sp>
+        <p:nvSpPr>
+          <p:cNvPr id="40" name="Card text"/>
+          <p:cNvSpPr txBox="1"/>
+          <p:nvPr/>
+        </p:nvSpPr>
+        <p:spPr>
+          <a:xfrm>
+            <a:off x="7552761" y="5660136"/>
+            <a:ext cx="1633667" cy="384048"/>
+          </a:xfrm>
+          <a:prstGeom prst="rect">
+            <a:avLst/>
+          </a:prstGeom>
+          <a:noFill/>
+          <a:ln/>
+        </p:spPr>
+        <p:txBody>
+          <a:bodyPr wrap="square" lIns="0" tIns="0" rIns="0" bIns="0" rtlCol="0" anchor="t"/>
+          <a:lstStyle/>
+          <a:p>
+            <a:pPr indent="0" marL="0">
+              <a:buNone/>
+            </a:pPr>
+            <a:r>
+              <a:rPr lang="en-US" sz="1200" dirty="0">
+                <a:solidFill>
+                  <a:schemeClr val="tx2"/>
+                </a:solidFill>
+              </a:rPr>
               <a:t>AXIOM-03 · five steps</a:t>
             </a:r>
-            <a:endParaRPr lang="en-US" sz="1300" dirty="0"/>
+            <a:endParaRPr lang="en-US" sz="1200" dirty="0"/>
           </a:p>
         </p:txBody>
       </p:sp>
